--- a/Docs/TechnicalBackground/RedDust_WebRTC_Electronics_Communication_Kim.pptx
+++ b/Docs/TechnicalBackground/RedDust_WebRTC_Electronics_Communication_Kim.pptx
@@ -5,18 +5,28 @@
     <p:sldMasterId id="2147483648" r:id="rId1"/>
   </p:sldMasterIdLst>
   <p:sldIdLst>
-    <p:sldId id="256" r:id="rId2"/>
-    <p:sldId id="257" r:id="rId3"/>
-    <p:sldId id="258" r:id="rId4"/>
-    <p:sldId id="259" r:id="rId5"/>
-    <p:sldId id="260" r:id="rId6"/>
-    <p:sldId id="261" r:id="rId7"/>
-    <p:sldId id="262" r:id="rId8"/>
-    <p:sldId id="263" r:id="rId9"/>
-    <p:sldId id="264" r:id="rId10"/>
-    <p:sldId id="265" r:id="rId11"/>
-    <p:sldId id="266" r:id="rId12"/>
-    <p:sldId id="267" r:id="rId13"/>
+    <p:sldId id="268" r:id="rId2"/>
+    <p:sldId id="269" r:id="rId3"/>
+    <p:sldId id="270" r:id="rId4"/>
+    <p:sldId id="271" r:id="rId5"/>
+    <p:sldId id="272" r:id="rId6"/>
+    <p:sldId id="273" r:id="rId7"/>
+    <p:sldId id="274" r:id="rId8"/>
+    <p:sldId id="275" r:id="rId9"/>
+    <p:sldId id="276" r:id="rId10"/>
+    <p:sldId id="277" r:id="rId11"/>
+    <p:sldId id="256" r:id="rId12"/>
+    <p:sldId id="257" r:id="rId13"/>
+    <p:sldId id="258" r:id="rId14"/>
+    <p:sldId id="259" r:id="rId15"/>
+    <p:sldId id="260" r:id="rId16"/>
+    <p:sldId id="261" r:id="rId17"/>
+    <p:sldId id="262" r:id="rId18"/>
+    <p:sldId id="263" r:id="rId19"/>
+    <p:sldId id="264" r:id="rId20"/>
+    <p:sldId id="265" r:id="rId21"/>
+    <p:sldId id="266" r:id="rId22"/>
+    <p:sldId id="267" r:id="rId23"/>
   </p:sldIdLst>
   <p:sldSz cx="12192000" cy="6858000"/>
   <p:notesSz cx="6858000" cy="9144000"/>
@@ -3122,6 +3132,500 @@
           <a:chExt cx="0" cy="0"/>
         </a:xfrm>
       </p:grpSpPr>
+      <p:sp>
+        <p:nvSpPr>
+          <p:cNvPr id="2" name="TextBox 1"/>
+          <p:cNvSpPr txBox="1"/>
+          <p:nvPr/>
+        </p:nvSpPr>
+        <p:spPr>
+          <a:xfrm>
+            <a:off x="502920" y="320040"/>
+            <a:ext cx="11064240" cy="914400"/>
+          </a:xfrm>
+          <a:prstGeom prst="rect">
+            <a:avLst/>
+          </a:prstGeom>
+          <a:noFill/>
+        </p:spPr>
+        <p:txBody>
+          <a:bodyPr wrap="square" lIns="0" tIns="0" rIns="0" bIns="0">
+            <a:spAutoFit/>
+          </a:bodyPr>
+          <a:lstStyle/>
+          <a:p>
+            <a:pPr>
+              <a:spcAft>
+                <a:spcPts val="1200"/>
+              </a:spcAft>
+              <a:defRPr sz="4800" b="1">
+                <a:solidFill>
+                  <a:srgbClr val="FFFFFF"/>
+                </a:solidFill>
+                <a:latin typeface="Arial"/>
+              </a:defRPr>
+            </a:pPr>
+            <a:r>
+              <a:rPr sz="2900" b="1">
+                <a:solidFill>
+                  <a:srgbClr val="16223C"/>
+                </a:solidFill>
+                <a:latin typeface="Aptos"/>
+              </a:rPr>
+              <a:t>From Airwaves to Audio Files</a:t>
+            </a:r>
+          </a:p>
+          <a:p>
+            <a:pPr>
+              <a:spcAft>
+                <a:spcPts val="2400"/>
+              </a:spcAft>
+              <a:defRPr sz="2400">
+                <a:solidFill>
+                  <a:srgbClr val="007AFF"/>
+                </a:solidFill>
+                <a:latin typeface="Arial"/>
+              </a:defRPr>
+            </a:pPr>
+            <a:r>
+              <a:rPr sz="2900" b="1">
+                <a:solidFill>
+                  <a:srgbClr val="16223C"/>
+                </a:solidFill>
+                <a:latin typeface="Aptos"/>
+              </a:rPr>
+              <a:t>The Physics and Mathematics of Digital Audio Sampling</a:t>
+            </a:r>
+          </a:p>
+          <a:p>
+            <a:pPr>
+              <a:defRPr sz="1600">
+                <a:solidFill>
+                  <a:srgbClr val="6C7A89"/>
+                </a:solidFill>
+                <a:latin typeface="Arial"/>
+              </a:defRPr>
+            </a:pPr>
+            <a:r>
+              <a:rPr sz="2900" b="1">
+                <a:solidFill>
+                  <a:srgbClr val="16223C"/>
+                </a:solidFill>
+                <a:latin typeface="Aptos"/>
+              </a:rPr>
+              <a:t>Understanding the Nyquist Theorem, ADC Pipelines, and Quantisation</a:t>
+            </a:r>
+          </a:p>
+        </p:txBody>
+      </p:sp>
+      <p:sp>
+        <p:nvSpPr>
+          <p:cNvPr id="3" name="Rectangle 2"/>
+          <p:cNvSpPr/>
+          <p:nvPr/>
+        </p:nvSpPr>
+        <p:spPr>
+          <a:xfrm>
+            <a:off x="0" y="0"/>
+            <a:ext cx="109728" cy="6858000"/>
+          </a:xfrm>
+          <a:prstGeom prst="rect">
+            <a:avLst/>
+          </a:prstGeom>
+          <a:solidFill>
+            <a:srgbClr val="684AA8"/>
+          </a:solidFill>
+          <a:ln>
+            <a:noFill/>
+          </a:ln>
+        </p:spPr>
+        <p:style>
+          <a:lnRef idx="1">
+            <a:schemeClr val="accent1"/>
+          </a:lnRef>
+          <a:fillRef idx="3">
+            <a:schemeClr val="accent1"/>
+          </a:fillRef>
+          <a:effectRef idx="2">
+            <a:schemeClr val="accent1"/>
+          </a:effectRef>
+          <a:fontRef idx="minor">
+            <a:schemeClr val="lt1"/>
+          </a:fontRef>
+        </p:style>
+        <p:txBody>
+          <a:bodyPr rtlCol="0" anchor="ctr"/>
+          <a:lstStyle/>
+          <a:p>
+            <a:pPr algn="ctr"/>
+            <a:endParaRPr/>
+          </a:p>
+        </p:txBody>
+      </p:sp>
+      <p:pic>
+        <p:nvPicPr>
+          <p:cNvPr id="4" name="Picture 3" descr="slide01.png"/>
+          <p:cNvPicPr>
+            <a:picLocks noChangeAspect="1"/>
+          </p:cNvPicPr>
+          <p:nvPr/>
+        </p:nvPicPr>
+        <p:blipFill>
+          <a:blip r:embed="rId2"/>
+          <a:stretch>
+            <a:fillRect/>
+          </a:stretch>
+        </p:blipFill>
+        <p:spPr>
+          <a:xfrm>
+            <a:off x="5303520" y="2331720"/>
+            <a:ext cx="6217920" cy="2809659"/>
+          </a:xfrm>
+          <a:prstGeom prst="rect">
+            <a:avLst/>
+          </a:prstGeom>
+        </p:spPr>
+      </p:pic>
+    </p:spTree>
+    <p:extLst>
+      <p:ext uri="{BB962C8B-B14F-4D97-AF65-F5344CB8AC3E}">
+        <p14:creationId xmlns:p14="http://schemas.microsoft.com/office/powerpoint/2010/main" val="4034508943"/>
+      </p:ext>
+    </p:extLst>
+  </p:cSld>
+  <p:clrMapOvr>
+    <a:masterClrMapping/>
+  </p:clrMapOvr>
+</p:sld>
+</file>
+
+<file path=ppt/slides/slide10.xml><?xml version="1.0" encoding="utf-8"?>
+<p:sld xmlns:a="http://schemas.openxmlformats.org/drawingml/2006/main" xmlns:r="http://schemas.openxmlformats.org/officeDocument/2006/relationships" xmlns:p="http://schemas.openxmlformats.org/presentationml/2006/main">
+  <p:cSld>
+    <p:spTree>
+      <p:nvGrpSpPr>
+        <p:cNvPr id="1" name=""/>
+        <p:cNvGrpSpPr/>
+        <p:nvPr/>
+      </p:nvGrpSpPr>
+      <p:grpSpPr>
+        <a:xfrm>
+          <a:off x="0" y="0"/>
+          <a:ext cx="0" cy="0"/>
+          <a:chOff x="0" y="0"/>
+          <a:chExt cx="0" cy="0"/>
+        </a:xfrm>
+      </p:grpSpPr>
+      <p:sp>
+        <p:nvSpPr>
+          <p:cNvPr id="2" name="TextBox 1"/>
+          <p:cNvSpPr txBox="1"/>
+          <p:nvPr/>
+        </p:nvSpPr>
+        <p:spPr>
+          <a:xfrm>
+            <a:off x="502920" y="320040"/>
+            <a:ext cx="11064240" cy="640080"/>
+          </a:xfrm>
+          <a:prstGeom prst="rect">
+            <a:avLst/>
+          </a:prstGeom>
+          <a:noFill/>
+        </p:spPr>
+        <p:txBody>
+          <a:bodyPr wrap="square" lIns="0" tIns="0" rIns="0" bIns="0">
+            <a:spAutoFit/>
+          </a:bodyPr>
+          <a:lstStyle/>
+          <a:p>
+            <a:pPr>
+              <a:defRPr sz="3200" b="1">
+                <a:solidFill>
+                  <a:srgbClr val="1A2530"/>
+                </a:solidFill>
+                <a:latin typeface="Arial"/>
+              </a:defRPr>
+            </a:pPr>
+            <a:r>
+              <a:rPr sz="2500" b="1">
+                <a:solidFill>
+                  <a:srgbClr val="16223C"/>
+                </a:solidFill>
+                <a:latin typeface="Aptos"/>
+              </a:rPr>
+              <a:t>Conclusion: Key Engineering Principles</a:t>
+            </a:r>
+          </a:p>
+        </p:txBody>
+      </p:sp>
+      <p:sp>
+        <p:nvSpPr>
+          <p:cNvPr id="3" name="TextBox 2"/>
+          <p:cNvSpPr txBox="1"/>
+          <p:nvPr/>
+        </p:nvSpPr>
+        <p:spPr>
+          <a:xfrm>
+            <a:off x="594360" y="1143000"/>
+            <a:ext cx="5486400" cy="5120640"/>
+          </a:xfrm>
+          <a:prstGeom prst="rect">
+            <a:avLst/>
+          </a:prstGeom>
+          <a:noFill/>
+        </p:spPr>
+        <p:txBody>
+          <a:bodyPr wrap="square" lIns="0" tIns="0" rIns="0" bIns="0">
+            <a:noAutofit/>
+          </a:bodyPr>
+          <a:lstStyle/>
+          <a:p>
+            <a:pPr>
+              <a:spcAft>
+                <a:spcPts val="700"/>
+              </a:spcAft>
+              <a:defRPr sz="1800">
+                <a:solidFill>
+                  <a:srgbClr val="1A2530"/>
+                </a:solidFill>
+                <a:latin typeface="Arial"/>
+              </a:defRPr>
+            </a:pPr>
+            <a:r>
+              <a:rPr sz="2400" dirty="0">
+                <a:solidFill>
+                  <a:srgbClr val="5D5E67"/>
+                </a:solidFill>
+                <a:latin typeface="Aptos"/>
+              </a:rPr>
+              <a:t>Time Domain Mastery: Elevating the sample rate extends the system's ability to record higher frequencies cleanly.</a:t>
+            </a:r>
+          </a:p>
+          <a:p>
+            <a:pPr>
+              <a:spcAft>
+                <a:spcPts val="700"/>
+              </a:spcAft>
+              <a:defRPr sz="1800">
+                <a:solidFill>
+                  <a:srgbClr val="1A2530"/>
+                </a:solidFill>
+                <a:latin typeface="Arial"/>
+              </a:defRPr>
+            </a:pPr>
+            <a:r>
+              <a:rPr sz="2400" dirty="0">
+                <a:solidFill>
+                  <a:srgbClr val="5D5E67"/>
+                </a:solidFill>
+                <a:latin typeface="Aptos"/>
+              </a:rPr>
+              <a:t>Amplitude Domain Mastery: Increasing the system bit depth drops the noise floor and expands total operational dynamic range.</a:t>
+            </a:r>
+          </a:p>
+          <a:p>
+            <a:pPr>
+              <a:spcAft>
+                <a:spcPts val="700"/>
+              </a:spcAft>
+              <a:defRPr sz="1800">
+                <a:solidFill>
+                  <a:srgbClr val="1A2530"/>
+                </a:solidFill>
+                <a:latin typeface="Arial"/>
+              </a:defRPr>
+            </a:pPr>
+            <a:r>
+              <a:rPr sz="2400" dirty="0">
+                <a:solidFill>
+                  <a:srgbClr val="5D5E67"/>
+                </a:solidFill>
+                <a:latin typeface="Aptos"/>
+              </a:rPr>
+              <a:t>Mathematical Perfection: When Nyquist criteria are fully satisfied, digital audio does not lose information—there are no jagged 'staircases' in the final output wave.</a:t>
+            </a:r>
+          </a:p>
+        </p:txBody>
+      </p:sp>
+      <p:sp>
+        <p:nvSpPr>
+          <p:cNvPr id="4" name="Rectangle 3"/>
+          <p:cNvSpPr/>
+          <p:nvPr/>
+        </p:nvSpPr>
+        <p:spPr>
+          <a:xfrm>
+            <a:off x="0" y="0"/>
+            <a:ext cx="109728" cy="6858000"/>
+          </a:xfrm>
+          <a:prstGeom prst="rect">
+            <a:avLst/>
+          </a:prstGeom>
+          <a:solidFill>
+            <a:srgbClr val="684AA8"/>
+          </a:solidFill>
+          <a:ln>
+            <a:noFill/>
+          </a:ln>
+        </p:spPr>
+        <p:style>
+          <a:lnRef idx="1">
+            <a:schemeClr val="accent1"/>
+          </a:lnRef>
+          <a:fillRef idx="3">
+            <a:schemeClr val="accent1"/>
+          </a:fillRef>
+          <a:effectRef idx="2">
+            <a:schemeClr val="accent1"/>
+          </a:effectRef>
+          <a:fontRef idx="minor">
+            <a:schemeClr val="lt1"/>
+          </a:fontRef>
+        </p:style>
+        <p:txBody>
+          <a:bodyPr rtlCol="0" anchor="ctr"/>
+          <a:lstStyle/>
+          <a:p>
+            <a:pPr algn="ctr"/>
+            <a:endParaRPr/>
+          </a:p>
+        </p:txBody>
+      </p:sp>
+      <p:sp>
+        <p:nvSpPr>
+          <p:cNvPr id="5" name="Rounded Rectangle 4"/>
+          <p:cNvSpPr/>
+          <p:nvPr/>
+        </p:nvSpPr>
+        <p:spPr>
+          <a:xfrm>
+            <a:off x="6309360" y="1143000"/>
+            <a:ext cx="5349240" cy="5212080"/>
+          </a:xfrm>
+          <a:prstGeom prst="roundRect">
+            <a:avLst/>
+          </a:prstGeom>
+          <a:solidFill>
+            <a:srgbClr val="F7F5FA"/>
+          </a:solidFill>
+          <a:ln w="12700">
+            <a:solidFill>
+              <a:srgbClr val="DAD5E2"/>
+            </a:solidFill>
+          </a:ln>
+        </p:spPr>
+        <p:style>
+          <a:lnRef idx="1">
+            <a:schemeClr val="accent1"/>
+          </a:lnRef>
+          <a:fillRef idx="3">
+            <a:schemeClr val="accent1"/>
+          </a:fillRef>
+          <a:effectRef idx="2">
+            <a:schemeClr val="accent1"/>
+          </a:effectRef>
+          <a:fontRef idx="minor">
+            <a:schemeClr val="lt1"/>
+          </a:fontRef>
+        </p:style>
+        <p:txBody>
+          <a:bodyPr rtlCol="0" anchor="ctr"/>
+          <a:lstStyle/>
+          <a:p>
+            <a:pPr algn="ctr"/>
+            <a:endParaRPr/>
+          </a:p>
+        </p:txBody>
+      </p:sp>
+      <p:pic>
+        <p:nvPicPr>
+          <p:cNvPr id="6" name="Picture 5" descr="slide10.png"/>
+          <p:cNvPicPr>
+            <a:picLocks noChangeAspect="1"/>
+          </p:cNvPicPr>
+          <p:nvPr/>
+        </p:nvPicPr>
+        <p:blipFill>
+          <a:blip r:embed="rId2"/>
+          <a:stretch>
+            <a:fillRect/>
+          </a:stretch>
+        </p:blipFill>
+        <p:spPr>
+          <a:xfrm>
+            <a:off x="6537960" y="1417320"/>
+            <a:ext cx="4892040" cy="2835269"/>
+          </a:xfrm>
+          <a:prstGeom prst="rect">
+            <a:avLst/>
+          </a:prstGeom>
+        </p:spPr>
+      </p:pic>
+      <p:sp>
+        <p:nvSpPr>
+          <p:cNvPr id="7" name="TextBox 6"/>
+          <p:cNvSpPr txBox="1"/>
+          <p:nvPr/>
+        </p:nvSpPr>
+        <p:spPr>
+          <a:xfrm>
+            <a:off x="6492240" y="5989320"/>
+            <a:ext cx="4937760" cy="274320"/>
+          </a:xfrm>
+          <a:prstGeom prst="rect">
+            <a:avLst/>
+          </a:prstGeom>
+          <a:noFill/>
+        </p:spPr>
+        <p:txBody>
+          <a:bodyPr wrap="none">
+            <a:spAutoFit/>
+          </a:bodyPr>
+          <a:lstStyle/>
+          <a:p>
+            <a:pPr algn="r"/>
+            <a:r>
+              <a:rPr sz="900">
+                <a:solidFill>
+                  <a:srgbClr val="5D5E67"/>
+                </a:solidFill>
+                <a:latin typeface="Aptos"/>
+              </a:rPr>
+              <a:t>Concept diagram</a:t>
+            </a:r>
+          </a:p>
+        </p:txBody>
+      </p:sp>
+    </p:spTree>
+    <p:extLst>
+      <p:ext uri="{BB962C8B-B14F-4D97-AF65-F5344CB8AC3E}">
+        <p14:creationId xmlns:p14="http://schemas.microsoft.com/office/powerpoint/2010/main" val="3926030910"/>
+      </p:ext>
+    </p:extLst>
+  </p:cSld>
+  <p:clrMapOvr>
+    <a:masterClrMapping/>
+  </p:clrMapOvr>
+</p:sld>
+</file>
+
+<file path=ppt/slides/slide11.xml><?xml version="1.0" encoding="utf-8"?>
+<p:sld xmlns:a="http://schemas.openxmlformats.org/drawingml/2006/main" xmlns:r="http://schemas.openxmlformats.org/officeDocument/2006/relationships" xmlns:p="http://schemas.openxmlformats.org/presentationml/2006/main">
+  <p:cSld>
+    <p:spTree>
+      <p:nvGrpSpPr>
+        <p:cNvPr id="1" name=""/>
+        <p:cNvGrpSpPr/>
+        <p:nvPr/>
+      </p:nvGrpSpPr>
+      <p:grpSpPr>
+        <a:xfrm>
+          <a:off x="0" y="0"/>
+          <a:ext cx="0" cy="0"/>
+          <a:chOff x="0" y="0"/>
+          <a:chExt cx="0" cy="0"/>
+        </a:xfrm>
+      </p:grpSpPr>
       <p:pic>
         <p:nvPicPr>
           <p:cNvPr id="2" name="Picture 1" descr="slide_01.png"/>
@@ -3161,7 +3665,930 @@
 </p:sld>
 </file>
 
-<file path=ppt/slides/slide10.xml><?xml version="1.0" encoding="utf-8"?>
+<file path=ppt/slides/slide12.xml><?xml version="1.0" encoding="utf-8"?>
+<p:sld xmlns:a="http://schemas.openxmlformats.org/drawingml/2006/main" xmlns:r="http://schemas.openxmlformats.org/officeDocument/2006/relationships" xmlns:p="http://schemas.openxmlformats.org/presentationml/2006/main">
+  <p:cSld>
+    <p:spTree>
+      <p:nvGrpSpPr>
+        <p:cNvPr id="1" name=""/>
+        <p:cNvGrpSpPr/>
+        <p:nvPr/>
+      </p:nvGrpSpPr>
+      <p:grpSpPr>
+        <a:xfrm>
+          <a:off x="0" y="0"/>
+          <a:ext cx="0" cy="0"/>
+          <a:chOff x="0" y="0"/>
+          <a:chExt cx="0" cy="0"/>
+        </a:xfrm>
+      </p:grpSpPr>
+      <p:pic>
+        <p:nvPicPr>
+          <p:cNvPr id="2" name="Picture 1" descr="slide_02.png"/>
+          <p:cNvPicPr>
+            <a:picLocks noChangeAspect="1"/>
+          </p:cNvPicPr>
+          <p:nvPr/>
+        </p:nvPicPr>
+        <p:blipFill>
+          <a:blip r:embed="rId2"/>
+          <a:stretch>
+            <a:fillRect/>
+          </a:stretch>
+        </p:blipFill>
+        <p:spPr>
+          <a:xfrm>
+            <a:off x="0" y="0"/>
+            <a:ext cx="12191999" cy="6858000"/>
+          </a:xfrm>
+          <a:prstGeom prst="rect">
+            <a:avLst/>
+          </a:prstGeom>
+        </p:spPr>
+      </p:pic>
+    </p:spTree>
+  </p:cSld>
+  <p:clrMapOvr>
+    <a:masterClrMapping/>
+  </p:clrMapOvr>
+  <p:timing>
+    <p:tnLst>
+      <p:par>
+        <p:cTn id="1" dur="indefinite" restart="never" nodeType="tmRoot"/>
+      </p:par>
+    </p:tnLst>
+  </p:timing>
+</p:sld>
+</file>
+
+<file path=ppt/slides/slide13.xml><?xml version="1.0" encoding="utf-8"?>
+<p:sld xmlns:a="http://schemas.openxmlformats.org/drawingml/2006/main" xmlns:r="http://schemas.openxmlformats.org/officeDocument/2006/relationships" xmlns:p="http://schemas.openxmlformats.org/presentationml/2006/main">
+  <p:cSld>
+    <p:spTree>
+      <p:nvGrpSpPr>
+        <p:cNvPr id="1" name=""/>
+        <p:cNvGrpSpPr/>
+        <p:nvPr/>
+      </p:nvGrpSpPr>
+      <p:grpSpPr>
+        <a:xfrm>
+          <a:off x="0" y="0"/>
+          <a:ext cx="0" cy="0"/>
+          <a:chOff x="0" y="0"/>
+          <a:chExt cx="0" cy="0"/>
+        </a:xfrm>
+      </p:grpSpPr>
+      <p:pic>
+        <p:nvPicPr>
+          <p:cNvPr id="2" name="Picture 1" descr="slide_03.png"/>
+          <p:cNvPicPr>
+            <a:picLocks noChangeAspect="1"/>
+          </p:cNvPicPr>
+          <p:nvPr/>
+        </p:nvPicPr>
+        <p:blipFill>
+          <a:blip r:embed="rId2"/>
+          <a:stretch>
+            <a:fillRect/>
+          </a:stretch>
+        </p:blipFill>
+        <p:spPr>
+          <a:xfrm>
+            <a:off x="0" y="0"/>
+            <a:ext cx="12191999" cy="6858000"/>
+          </a:xfrm>
+          <a:prstGeom prst="rect">
+            <a:avLst/>
+          </a:prstGeom>
+        </p:spPr>
+      </p:pic>
+    </p:spTree>
+  </p:cSld>
+  <p:clrMapOvr>
+    <a:masterClrMapping/>
+  </p:clrMapOvr>
+  <p:timing>
+    <p:tnLst>
+      <p:par>
+        <p:cTn id="1" dur="indefinite" restart="never" nodeType="tmRoot"/>
+      </p:par>
+    </p:tnLst>
+  </p:timing>
+</p:sld>
+</file>
+
+<file path=ppt/slides/slide14.xml><?xml version="1.0" encoding="utf-8"?>
+<p:sld xmlns:a="http://schemas.openxmlformats.org/drawingml/2006/main" xmlns:r="http://schemas.openxmlformats.org/officeDocument/2006/relationships" xmlns:p="http://schemas.openxmlformats.org/presentationml/2006/main">
+  <p:cSld>
+    <p:spTree>
+      <p:nvGrpSpPr>
+        <p:cNvPr id="1" name=""/>
+        <p:cNvGrpSpPr/>
+        <p:nvPr/>
+      </p:nvGrpSpPr>
+      <p:grpSpPr>
+        <a:xfrm>
+          <a:off x="0" y="0"/>
+          <a:ext cx="0" cy="0"/>
+          <a:chOff x="0" y="0"/>
+          <a:chExt cx="0" cy="0"/>
+        </a:xfrm>
+      </p:grpSpPr>
+      <p:pic>
+        <p:nvPicPr>
+          <p:cNvPr id="2" name="Picture 1" descr="slide_04.png"/>
+          <p:cNvPicPr>
+            <a:picLocks noChangeAspect="1"/>
+          </p:cNvPicPr>
+          <p:nvPr/>
+        </p:nvPicPr>
+        <p:blipFill>
+          <a:blip r:embed="rId2"/>
+          <a:stretch>
+            <a:fillRect/>
+          </a:stretch>
+        </p:blipFill>
+        <p:spPr>
+          <a:xfrm>
+            <a:off x="0" y="0"/>
+            <a:ext cx="12191999" cy="6858000"/>
+          </a:xfrm>
+          <a:prstGeom prst="rect">
+            <a:avLst/>
+          </a:prstGeom>
+        </p:spPr>
+      </p:pic>
+    </p:spTree>
+  </p:cSld>
+  <p:clrMapOvr>
+    <a:masterClrMapping/>
+  </p:clrMapOvr>
+  <p:timing>
+    <p:tnLst>
+      <p:par>
+        <p:cTn id="1" dur="indefinite" restart="never" nodeType="tmRoot"/>
+      </p:par>
+    </p:tnLst>
+  </p:timing>
+</p:sld>
+</file>
+
+<file path=ppt/slides/slide15.xml><?xml version="1.0" encoding="utf-8"?>
+<p:sld xmlns:a="http://schemas.openxmlformats.org/drawingml/2006/main" xmlns:r="http://schemas.openxmlformats.org/officeDocument/2006/relationships" xmlns:p="http://schemas.openxmlformats.org/presentationml/2006/main">
+  <p:cSld>
+    <p:spTree>
+      <p:nvGrpSpPr>
+        <p:cNvPr id="1" name=""/>
+        <p:cNvGrpSpPr/>
+        <p:nvPr/>
+      </p:nvGrpSpPr>
+      <p:grpSpPr>
+        <a:xfrm>
+          <a:off x="0" y="0"/>
+          <a:ext cx="0" cy="0"/>
+          <a:chOff x="0" y="0"/>
+          <a:chExt cx="0" cy="0"/>
+        </a:xfrm>
+      </p:grpSpPr>
+      <p:pic>
+        <p:nvPicPr>
+          <p:cNvPr id="2" name="Picture 1" descr="slide_05.png"/>
+          <p:cNvPicPr>
+            <a:picLocks noChangeAspect="1"/>
+          </p:cNvPicPr>
+          <p:nvPr/>
+        </p:nvPicPr>
+        <p:blipFill>
+          <a:blip r:embed="rId2"/>
+          <a:stretch>
+            <a:fillRect/>
+          </a:stretch>
+        </p:blipFill>
+        <p:spPr>
+          <a:xfrm>
+            <a:off x="0" y="0"/>
+            <a:ext cx="12191999" cy="6858000"/>
+          </a:xfrm>
+          <a:prstGeom prst="rect">
+            <a:avLst/>
+          </a:prstGeom>
+        </p:spPr>
+      </p:pic>
+      <p:pic>
+        <p:nvPicPr>
+          <p:cNvPr id="3" name="Picture 2"/>
+          <p:cNvPicPr>
+            <a:picLocks noChangeAspect="1"/>
+          </p:cNvPicPr>
+          <p:nvPr/>
+        </p:nvPicPr>
+        <p:blipFill>
+          <a:blip r:embed="rId3"/>
+          <a:stretch>
+            <a:fillRect/>
+          </a:stretch>
+        </p:blipFill>
+        <p:spPr>
+          <a:xfrm>
+            <a:off x="8320080" y="-91408"/>
+            <a:ext cx="3443749" cy="3865122"/>
+          </a:xfrm>
+          <a:prstGeom prst="rect">
+            <a:avLst/>
+          </a:prstGeom>
+        </p:spPr>
+      </p:pic>
+    </p:spTree>
+  </p:cSld>
+  <p:clrMapOvr>
+    <a:masterClrMapping/>
+  </p:clrMapOvr>
+  <p:timing>
+    <p:tnLst>
+      <p:par>
+        <p:cTn id="1" dur="indefinite" restart="never" nodeType="tmRoot"/>
+      </p:par>
+    </p:tnLst>
+  </p:timing>
+</p:sld>
+</file>
+
+<file path=ppt/slides/slide16.xml><?xml version="1.0" encoding="utf-8"?>
+<p:sld xmlns:a="http://schemas.openxmlformats.org/drawingml/2006/main" xmlns:r="http://schemas.openxmlformats.org/officeDocument/2006/relationships" xmlns:p="http://schemas.openxmlformats.org/presentationml/2006/main">
+  <p:cSld>
+    <p:spTree>
+      <p:nvGrpSpPr>
+        <p:cNvPr id="1" name=""/>
+        <p:cNvGrpSpPr/>
+        <p:nvPr/>
+      </p:nvGrpSpPr>
+      <p:grpSpPr>
+        <a:xfrm>
+          <a:off x="0" y="0"/>
+          <a:ext cx="0" cy="0"/>
+          <a:chOff x="0" y="0"/>
+          <a:chExt cx="0" cy="0"/>
+        </a:xfrm>
+      </p:grpSpPr>
+      <p:pic>
+        <p:nvPicPr>
+          <p:cNvPr id="2" name="Picture 1" descr="slide_06.png"/>
+          <p:cNvPicPr>
+            <a:picLocks noChangeAspect="1"/>
+          </p:cNvPicPr>
+          <p:nvPr/>
+        </p:nvPicPr>
+        <p:blipFill>
+          <a:blip r:embed="rId2"/>
+          <a:stretch>
+            <a:fillRect/>
+          </a:stretch>
+        </p:blipFill>
+        <p:spPr>
+          <a:xfrm>
+            <a:off x="0" y="0"/>
+            <a:ext cx="12191999" cy="6858000"/>
+          </a:xfrm>
+          <a:prstGeom prst="rect">
+            <a:avLst/>
+          </a:prstGeom>
+        </p:spPr>
+      </p:pic>
+    </p:spTree>
+  </p:cSld>
+  <p:clrMapOvr>
+    <a:masterClrMapping/>
+  </p:clrMapOvr>
+  <p:timing>
+    <p:tnLst>
+      <p:par>
+        <p:cTn id="1" dur="indefinite" restart="never" nodeType="tmRoot"/>
+      </p:par>
+    </p:tnLst>
+  </p:timing>
+</p:sld>
+</file>
+
+<file path=ppt/slides/slide17.xml><?xml version="1.0" encoding="utf-8"?>
+<p:sld xmlns:a="http://schemas.openxmlformats.org/drawingml/2006/main" xmlns:r="http://schemas.openxmlformats.org/officeDocument/2006/relationships" xmlns:p="http://schemas.openxmlformats.org/presentationml/2006/main">
+  <p:cSld>
+    <p:spTree>
+      <p:nvGrpSpPr>
+        <p:cNvPr id="1" name=""/>
+        <p:cNvGrpSpPr/>
+        <p:nvPr/>
+      </p:nvGrpSpPr>
+      <p:grpSpPr>
+        <a:xfrm>
+          <a:off x="0" y="0"/>
+          <a:ext cx="0" cy="0"/>
+          <a:chOff x="0" y="0"/>
+          <a:chExt cx="0" cy="0"/>
+        </a:xfrm>
+      </p:grpSpPr>
+      <p:pic>
+        <p:nvPicPr>
+          <p:cNvPr id="2" name="Picture 1" descr="slide_07.png"/>
+          <p:cNvPicPr>
+            <a:picLocks noChangeAspect="1"/>
+          </p:cNvPicPr>
+          <p:nvPr/>
+        </p:nvPicPr>
+        <p:blipFill>
+          <a:blip r:embed="rId2"/>
+          <a:stretch>
+            <a:fillRect/>
+          </a:stretch>
+        </p:blipFill>
+        <p:spPr>
+          <a:xfrm>
+            <a:off x="0" y="0"/>
+            <a:ext cx="12191999" cy="6858000"/>
+          </a:xfrm>
+          <a:prstGeom prst="rect">
+            <a:avLst/>
+          </a:prstGeom>
+        </p:spPr>
+      </p:pic>
+    </p:spTree>
+  </p:cSld>
+  <p:clrMapOvr>
+    <a:masterClrMapping/>
+  </p:clrMapOvr>
+</p:sld>
+</file>
+
+<file path=ppt/slides/slide18.xml><?xml version="1.0" encoding="utf-8"?>
+<p:sld xmlns:a="http://schemas.openxmlformats.org/drawingml/2006/main" xmlns:r="http://schemas.openxmlformats.org/officeDocument/2006/relationships" xmlns:p="http://schemas.openxmlformats.org/presentationml/2006/main">
+  <p:cSld>
+    <p:spTree>
+      <p:nvGrpSpPr>
+        <p:cNvPr id="1" name=""/>
+        <p:cNvGrpSpPr/>
+        <p:nvPr/>
+      </p:nvGrpSpPr>
+      <p:grpSpPr>
+        <a:xfrm>
+          <a:off x="0" y="0"/>
+          <a:ext cx="0" cy="0"/>
+          <a:chOff x="0" y="0"/>
+          <a:chExt cx="0" cy="0"/>
+        </a:xfrm>
+      </p:grpSpPr>
+      <p:pic>
+        <p:nvPicPr>
+          <p:cNvPr id="2" name="Picture 1" descr="slide_08.png"/>
+          <p:cNvPicPr>
+            <a:picLocks noChangeAspect="1"/>
+          </p:cNvPicPr>
+          <p:nvPr/>
+        </p:nvPicPr>
+        <p:blipFill>
+          <a:blip r:embed="rId2"/>
+          <a:stretch>
+            <a:fillRect/>
+          </a:stretch>
+        </p:blipFill>
+        <p:spPr>
+          <a:xfrm>
+            <a:off x="0" y="0"/>
+            <a:ext cx="12191999" cy="6858000"/>
+          </a:xfrm>
+          <a:prstGeom prst="rect">
+            <a:avLst/>
+          </a:prstGeom>
+        </p:spPr>
+      </p:pic>
+      <p:sp>
+        <p:nvSpPr>
+          <p:cNvPr id="3" name="Rectangle 2"/>
+          <p:cNvSpPr/>
+          <p:nvPr/>
+        </p:nvSpPr>
+        <p:spPr>
+          <a:xfrm>
+            <a:off x="3219556" y="2697110"/>
+            <a:ext cx="2382383" cy="769441"/>
+          </a:xfrm>
+          <a:prstGeom prst="rect">
+            <a:avLst/>
+          </a:prstGeom>
+        </p:spPr>
+        <p:txBody>
+          <a:bodyPr wrap="none">
+            <a:spAutoFit/>
+          </a:bodyPr>
+          <a:lstStyle/>
+          <a:p>
+            <a:r>
+              <a:rPr lang="en-AU" sz="1100" dirty="0"/>
+              <a:t>Network Address </a:t>
+            </a:r>
+            <a:r>
+              <a:rPr lang="en-AU" sz="1100" dirty="0" smtClean="0"/>
+              <a:t>Translation</a:t>
+            </a:r>
+          </a:p>
+          <a:p>
+            <a:r>
+              <a:rPr lang="en-AU" sz="1100" dirty="0"/>
+              <a:t>Interactive Connectivity </a:t>
+            </a:r>
+            <a:r>
+              <a:rPr lang="en-AU" sz="1100" dirty="0" smtClean="0"/>
+              <a:t>Establishment</a:t>
+            </a:r>
+          </a:p>
+          <a:p>
+            <a:r>
+              <a:rPr lang="en-AU" sz="1100" dirty="0"/>
+              <a:t>Session Traversal Utilities for </a:t>
+            </a:r>
+            <a:r>
+              <a:rPr lang="en-AU" sz="1100" dirty="0" smtClean="0"/>
+              <a:t>NAT</a:t>
+            </a:r>
+            <a:br>
+              <a:rPr lang="en-AU" sz="1100" dirty="0" smtClean="0"/>
+            </a:br>
+            <a:r>
+              <a:rPr lang="en-US" sz="1100" dirty="0" smtClean="0"/>
+              <a:t>Traversal </a:t>
+            </a:r>
+            <a:r>
+              <a:rPr lang="en-US" sz="1100" dirty="0"/>
+              <a:t>Using Relays around </a:t>
+            </a:r>
+            <a:r>
+              <a:rPr lang="en-US" sz="1100" dirty="0" smtClean="0"/>
+              <a:t>NAT</a:t>
+            </a:r>
+          </a:p>
+        </p:txBody>
+      </p:sp>
+      <p:sp>
+        <p:nvSpPr>
+          <p:cNvPr id="4" name="Rectangle 3"/>
+          <p:cNvSpPr/>
+          <p:nvPr/>
+        </p:nvSpPr>
+        <p:spPr>
+          <a:xfrm>
+            <a:off x="754743" y="4208921"/>
+            <a:ext cx="2387600" cy="430887"/>
+          </a:xfrm>
+          <a:prstGeom prst="rect">
+            <a:avLst/>
+          </a:prstGeom>
+        </p:spPr>
+        <p:txBody>
+          <a:bodyPr wrap="square">
+            <a:spAutoFit/>
+          </a:bodyPr>
+          <a:lstStyle/>
+          <a:p>
+            <a:r>
+              <a:rPr lang="en-US" sz="1100" dirty="0"/>
+              <a:t>Datagram Transport Layer </a:t>
+            </a:r>
+            <a:r>
+              <a:rPr lang="en-US" sz="1100" dirty="0" smtClean="0"/>
+              <a:t>Security</a:t>
+            </a:r>
+          </a:p>
+          <a:p>
+            <a:r>
+              <a:rPr lang="en-US" sz="1100" dirty="0" smtClean="0"/>
+              <a:t>Secure </a:t>
+            </a:r>
+            <a:r>
+              <a:rPr lang="en-US" sz="1100" dirty="0"/>
+              <a:t>Real-time Transport Protocol</a:t>
+            </a:r>
+            <a:endParaRPr lang="en-AU" sz="1100" dirty="0"/>
+          </a:p>
+        </p:txBody>
+      </p:sp>
+    </p:spTree>
+  </p:cSld>
+  <p:clrMapOvr>
+    <a:masterClrMapping/>
+  </p:clrMapOvr>
+</p:sld>
+</file>
+
+<file path=ppt/slides/slide19.xml><?xml version="1.0" encoding="utf-8"?>
+<p:sld xmlns:a="http://schemas.openxmlformats.org/drawingml/2006/main" xmlns:r="http://schemas.openxmlformats.org/officeDocument/2006/relationships" xmlns:p="http://schemas.openxmlformats.org/presentationml/2006/main">
+  <p:cSld>
+    <p:spTree>
+      <p:nvGrpSpPr>
+        <p:cNvPr id="1" name=""/>
+        <p:cNvGrpSpPr/>
+        <p:nvPr/>
+      </p:nvGrpSpPr>
+      <p:grpSpPr>
+        <a:xfrm>
+          <a:off x="0" y="0"/>
+          <a:ext cx="0" cy="0"/>
+          <a:chOff x="0" y="0"/>
+          <a:chExt cx="0" cy="0"/>
+        </a:xfrm>
+      </p:grpSpPr>
+      <p:pic>
+        <p:nvPicPr>
+          <p:cNvPr id="2" name="Picture 1" descr="slide_09.png"/>
+          <p:cNvPicPr>
+            <a:picLocks noChangeAspect="1"/>
+          </p:cNvPicPr>
+          <p:nvPr/>
+        </p:nvPicPr>
+        <p:blipFill>
+          <a:blip r:embed="rId2"/>
+          <a:stretch>
+            <a:fillRect/>
+          </a:stretch>
+        </p:blipFill>
+        <p:spPr>
+          <a:xfrm>
+            <a:off x="0" y="0"/>
+            <a:ext cx="12191999" cy="6858000"/>
+          </a:xfrm>
+          <a:prstGeom prst="rect">
+            <a:avLst/>
+          </a:prstGeom>
+        </p:spPr>
+      </p:pic>
+      <p:pic>
+        <p:nvPicPr>
+          <p:cNvPr id="3" name="Picture 2"/>
+          <p:cNvPicPr>
+            <a:picLocks noChangeAspect="1"/>
+          </p:cNvPicPr>
+          <p:nvPr/>
+        </p:nvPicPr>
+        <p:blipFill>
+          <a:blip r:embed="rId3" cstate="print">
+            <a:extLst>
+              <a:ext uri="{28A0092B-C50C-407E-A947-70E740481C1C}">
+                <a14:useLocalDpi xmlns:a14="http://schemas.microsoft.com/office/drawing/2010/main" val="0"/>
+              </a:ext>
+            </a:extLst>
+          </a:blip>
+          <a:stretch>
+            <a:fillRect/>
+          </a:stretch>
+        </p:blipFill>
+        <p:spPr>
+          <a:xfrm>
+            <a:off x="8585151" y="2580846"/>
+            <a:ext cx="2324983" cy="2324983"/>
+          </a:xfrm>
+          <a:prstGeom prst="rect">
+            <a:avLst/>
+          </a:prstGeom>
+        </p:spPr>
+      </p:pic>
+    </p:spTree>
+  </p:cSld>
+  <p:clrMapOvr>
+    <a:masterClrMapping/>
+  </p:clrMapOvr>
+</p:sld>
+</file>
+
+<file path=ppt/slides/slide2.xml><?xml version="1.0" encoding="utf-8"?>
+<p:sld xmlns:a="http://schemas.openxmlformats.org/drawingml/2006/main" xmlns:r="http://schemas.openxmlformats.org/officeDocument/2006/relationships" xmlns:p="http://schemas.openxmlformats.org/presentationml/2006/main">
+  <p:cSld>
+    <p:spTree>
+      <p:nvGrpSpPr>
+        <p:cNvPr id="1" name=""/>
+        <p:cNvGrpSpPr/>
+        <p:nvPr/>
+      </p:nvGrpSpPr>
+      <p:grpSpPr>
+        <a:xfrm>
+          <a:off x="0" y="0"/>
+          <a:ext cx="0" cy="0"/>
+          <a:chOff x="0" y="0"/>
+          <a:chExt cx="0" cy="0"/>
+        </a:xfrm>
+      </p:grpSpPr>
+      <p:sp>
+        <p:nvSpPr>
+          <p:cNvPr id="2" name="TextBox 1"/>
+          <p:cNvSpPr txBox="1"/>
+          <p:nvPr/>
+        </p:nvSpPr>
+        <p:spPr>
+          <a:xfrm>
+            <a:off x="502920" y="320040"/>
+            <a:ext cx="11064240" cy="640080"/>
+          </a:xfrm>
+          <a:prstGeom prst="rect">
+            <a:avLst/>
+          </a:prstGeom>
+          <a:noFill/>
+        </p:spPr>
+        <p:txBody>
+          <a:bodyPr wrap="square" lIns="0" tIns="0" rIns="0" bIns="0">
+            <a:spAutoFit/>
+          </a:bodyPr>
+          <a:lstStyle/>
+          <a:p>
+            <a:pPr>
+              <a:defRPr sz="3200" b="1">
+                <a:solidFill>
+                  <a:srgbClr val="1A2530"/>
+                </a:solidFill>
+                <a:latin typeface="Arial"/>
+              </a:defRPr>
+            </a:pPr>
+            <a:r>
+              <a:rPr sz="2500" b="1">
+                <a:solidFill>
+                  <a:srgbClr val="16223C"/>
+                </a:solidFill>
+                <a:latin typeface="Aptos"/>
+              </a:rPr>
+              <a:t>The Core Challenge: Continuous vs. Discrete</a:t>
+            </a:r>
+          </a:p>
+        </p:txBody>
+      </p:sp>
+      <p:sp>
+        <p:nvSpPr>
+          <p:cNvPr id="3" name="TextBox 2"/>
+          <p:cNvSpPr txBox="1"/>
+          <p:nvPr/>
+        </p:nvSpPr>
+        <p:spPr>
+          <a:xfrm>
+            <a:off x="594360" y="1143000"/>
+            <a:ext cx="5486400" cy="5120640"/>
+          </a:xfrm>
+          <a:prstGeom prst="rect">
+            <a:avLst/>
+          </a:prstGeom>
+          <a:noFill/>
+        </p:spPr>
+        <p:txBody>
+          <a:bodyPr wrap="square" lIns="0" tIns="0" rIns="0" bIns="0">
+            <a:normAutofit/>
+          </a:bodyPr>
+          <a:lstStyle/>
+          <a:p>
+            <a:pPr>
+              <a:spcAft>
+                <a:spcPts val="700"/>
+              </a:spcAft>
+              <a:defRPr sz="1800">
+                <a:solidFill>
+                  <a:srgbClr val="1A2530"/>
+                </a:solidFill>
+                <a:latin typeface="Arial"/>
+              </a:defRPr>
+            </a:pPr>
+            <a:r>
+              <a:rPr sz="1400">
+                <a:solidFill>
+                  <a:srgbClr val="5D5E67"/>
+                </a:solidFill>
+                <a:latin typeface="Aptos"/>
+              </a:rPr>
+              <a:t>Physical Reality: True sound is an analog pressure wave, infinitely variable in both time and amplitude.</a:t>
+            </a:r>
+          </a:p>
+          <a:p>
+            <a:pPr>
+              <a:spcAft>
+                <a:spcPts val="700"/>
+              </a:spcAft>
+              <a:defRPr sz="1800">
+                <a:solidFill>
+                  <a:srgbClr val="1A2530"/>
+                </a:solidFill>
+                <a:latin typeface="Arial"/>
+              </a:defRPr>
+            </a:pPr>
+            <a:r>
+              <a:rPr sz="1400">
+                <a:solidFill>
+                  <a:srgbClr val="5D5E67"/>
+                </a:solidFill>
+                <a:latin typeface="Aptos"/>
+              </a:rPr>
+              <a:t>Digital Reality: Computational architectures only process binary code (discrete 0s and 1s).</a:t>
+            </a:r>
+          </a:p>
+          <a:p>
+            <a:pPr>
+              <a:spcAft>
+                <a:spcPts val="700"/>
+              </a:spcAft>
+              <a:defRPr sz="1800">
+                <a:solidFill>
+                  <a:srgbClr val="1A2530"/>
+                </a:solidFill>
+                <a:latin typeface="Arial"/>
+              </a:defRPr>
+            </a:pPr>
+            <a:r>
+              <a:rPr sz="1400">
+                <a:solidFill>
+                  <a:srgbClr val="5D5E67"/>
+                </a:solidFill>
+                <a:latin typeface="Aptos"/>
+              </a:rPr>
+              <a:t>The Bridge: Sampling acts as the mathematical and electrical link, slicing continuous waves into distinct numerical frames.</a:t>
+            </a:r>
+          </a:p>
+          <a:p>
+            <a:pPr>
+              <a:spcAft>
+                <a:spcPts val="700"/>
+              </a:spcAft>
+              <a:defRPr sz="1800">
+                <a:solidFill>
+                  <a:srgbClr val="1A2530"/>
+                </a:solidFill>
+                <a:latin typeface="Arial"/>
+              </a:defRPr>
+            </a:pPr>
+            <a:r>
+              <a:rPr sz="1400">
+                <a:solidFill>
+                  <a:srgbClr val="5D5E67"/>
+                </a:solidFill>
+                <a:latin typeface="Aptos"/>
+              </a:rPr>
+              <a:t>Information Integrity: The process must capture enough detail to allow exact wave reconstruction without raw data bloat.</a:t>
+            </a:r>
+          </a:p>
+        </p:txBody>
+      </p:sp>
+      <p:sp>
+        <p:nvSpPr>
+          <p:cNvPr id="4" name="Rectangle 3"/>
+          <p:cNvSpPr/>
+          <p:nvPr/>
+        </p:nvSpPr>
+        <p:spPr>
+          <a:xfrm>
+            <a:off x="0" y="0"/>
+            <a:ext cx="109728" cy="6858000"/>
+          </a:xfrm>
+          <a:prstGeom prst="rect">
+            <a:avLst/>
+          </a:prstGeom>
+          <a:solidFill>
+            <a:srgbClr val="684AA8"/>
+          </a:solidFill>
+          <a:ln>
+            <a:noFill/>
+          </a:ln>
+        </p:spPr>
+        <p:style>
+          <a:lnRef idx="1">
+            <a:schemeClr val="accent1"/>
+          </a:lnRef>
+          <a:fillRef idx="3">
+            <a:schemeClr val="accent1"/>
+          </a:fillRef>
+          <a:effectRef idx="2">
+            <a:schemeClr val="accent1"/>
+          </a:effectRef>
+          <a:fontRef idx="minor">
+            <a:schemeClr val="lt1"/>
+          </a:fontRef>
+        </p:style>
+        <p:txBody>
+          <a:bodyPr rtlCol="0" anchor="ctr"/>
+          <a:lstStyle/>
+          <a:p>
+            <a:pPr algn="ctr"/>
+            <a:endParaRPr/>
+          </a:p>
+        </p:txBody>
+      </p:sp>
+      <p:sp>
+        <p:nvSpPr>
+          <p:cNvPr id="5" name="Rounded Rectangle 4"/>
+          <p:cNvSpPr/>
+          <p:nvPr/>
+        </p:nvSpPr>
+        <p:spPr>
+          <a:xfrm>
+            <a:off x="6309360" y="1143000"/>
+            <a:ext cx="5349240" cy="5212080"/>
+          </a:xfrm>
+          <a:prstGeom prst="roundRect">
+            <a:avLst/>
+          </a:prstGeom>
+          <a:solidFill>
+            <a:srgbClr val="F7F5FA"/>
+          </a:solidFill>
+          <a:ln w="12700">
+            <a:solidFill>
+              <a:srgbClr val="DAD5E2"/>
+            </a:solidFill>
+          </a:ln>
+        </p:spPr>
+        <p:style>
+          <a:lnRef idx="1">
+            <a:schemeClr val="accent1"/>
+          </a:lnRef>
+          <a:fillRef idx="3">
+            <a:schemeClr val="accent1"/>
+          </a:fillRef>
+          <a:effectRef idx="2">
+            <a:schemeClr val="accent1"/>
+          </a:effectRef>
+          <a:fontRef idx="minor">
+            <a:schemeClr val="lt1"/>
+          </a:fontRef>
+        </p:style>
+        <p:txBody>
+          <a:bodyPr rtlCol="0" anchor="ctr"/>
+          <a:lstStyle/>
+          <a:p>
+            <a:pPr algn="ctr"/>
+            <a:endParaRPr/>
+          </a:p>
+        </p:txBody>
+      </p:sp>
+      <p:pic>
+        <p:nvPicPr>
+          <p:cNvPr id="6" name="Picture 5" descr="slide02.png"/>
+          <p:cNvPicPr>
+            <a:picLocks noChangeAspect="1"/>
+          </p:cNvPicPr>
+          <p:nvPr/>
+        </p:nvPicPr>
+        <p:blipFill>
+          <a:blip r:embed="rId2"/>
+          <a:stretch>
+            <a:fillRect/>
+          </a:stretch>
+        </p:blipFill>
+        <p:spPr>
+          <a:xfrm>
+            <a:off x="6537960" y="1417320"/>
+            <a:ext cx="4892040" cy="3491476"/>
+          </a:xfrm>
+          <a:prstGeom prst="rect">
+            <a:avLst/>
+          </a:prstGeom>
+        </p:spPr>
+      </p:pic>
+      <p:sp>
+        <p:nvSpPr>
+          <p:cNvPr id="7" name="TextBox 6"/>
+          <p:cNvSpPr txBox="1"/>
+          <p:nvPr/>
+        </p:nvSpPr>
+        <p:spPr>
+          <a:xfrm>
+            <a:off x="6492240" y="5989320"/>
+            <a:ext cx="4937760" cy="274320"/>
+          </a:xfrm>
+          <a:prstGeom prst="rect">
+            <a:avLst/>
+          </a:prstGeom>
+          <a:noFill/>
+        </p:spPr>
+        <p:txBody>
+          <a:bodyPr wrap="none">
+            <a:spAutoFit/>
+          </a:bodyPr>
+          <a:lstStyle/>
+          <a:p>
+            <a:pPr algn="r"/>
+            <a:r>
+              <a:rPr sz="900">
+                <a:solidFill>
+                  <a:srgbClr val="5D5E67"/>
+                </a:solidFill>
+                <a:latin typeface="Aptos"/>
+              </a:rPr>
+              <a:t>Concept diagram</a:t>
+            </a:r>
+          </a:p>
+        </p:txBody>
+      </p:sp>
+    </p:spTree>
+    <p:extLst>
+      <p:ext uri="{BB962C8B-B14F-4D97-AF65-F5344CB8AC3E}">
+        <p14:creationId xmlns:p14="http://schemas.microsoft.com/office/powerpoint/2010/main" val="1899077585"/>
+      </p:ext>
+    </p:extLst>
+  </p:cSld>
+  <p:clrMapOvr>
+    <a:masterClrMapping/>
+  </p:clrMapOvr>
+</p:sld>
+</file>
+
+<file path=ppt/slides/slide20.xml><?xml version="1.0" encoding="utf-8"?>
 <p:sld xmlns:a="http://schemas.openxmlformats.org/drawingml/2006/main" xmlns:r="http://schemas.openxmlformats.org/officeDocument/2006/relationships" xmlns:p="http://schemas.openxmlformats.org/presentationml/2006/main">
   <p:cSld>
     <p:spTree>
@@ -3240,7 +4667,7 @@
 </p:sld>
 </file>
 
-<file path=ppt/slides/slide11.xml><?xml version="1.0" encoding="utf-8"?>
+<file path=ppt/slides/slide21.xml><?xml version="1.0" encoding="utf-8"?>
 <p:sld xmlns:a="http://schemas.openxmlformats.org/drawingml/2006/main" xmlns:r="http://schemas.openxmlformats.org/officeDocument/2006/relationships" xmlns:p="http://schemas.openxmlformats.org/presentationml/2006/main">
   <p:cSld>
     <p:spTree>
@@ -3289,7 +4716,7 @@
 </p:sld>
 </file>
 
-<file path=ppt/slides/slide12.xml><?xml version="1.0" encoding="utf-8"?>
+<file path=ppt/slides/slide22.xml><?xml version="1.0" encoding="utf-8"?>
 <p:sld xmlns:a="http://schemas.openxmlformats.org/drawingml/2006/main" xmlns:r="http://schemas.openxmlformats.org/officeDocument/2006/relationships" xmlns:p="http://schemas.openxmlformats.org/presentationml/2006/main">
   <p:cSld>
     <p:spTree>
@@ -3368,62 +4795,6 @@
 </p:sld>
 </file>
 
-<file path=ppt/slides/slide2.xml><?xml version="1.0" encoding="utf-8"?>
-<p:sld xmlns:a="http://schemas.openxmlformats.org/drawingml/2006/main" xmlns:r="http://schemas.openxmlformats.org/officeDocument/2006/relationships" xmlns:p="http://schemas.openxmlformats.org/presentationml/2006/main">
-  <p:cSld>
-    <p:spTree>
-      <p:nvGrpSpPr>
-        <p:cNvPr id="1" name=""/>
-        <p:cNvGrpSpPr/>
-        <p:nvPr/>
-      </p:nvGrpSpPr>
-      <p:grpSpPr>
-        <a:xfrm>
-          <a:off x="0" y="0"/>
-          <a:ext cx="0" cy="0"/>
-          <a:chOff x="0" y="0"/>
-          <a:chExt cx="0" cy="0"/>
-        </a:xfrm>
-      </p:grpSpPr>
-      <p:pic>
-        <p:nvPicPr>
-          <p:cNvPr id="2" name="Picture 1" descr="slide_02.png"/>
-          <p:cNvPicPr>
-            <a:picLocks noChangeAspect="1"/>
-          </p:cNvPicPr>
-          <p:nvPr/>
-        </p:nvPicPr>
-        <p:blipFill>
-          <a:blip r:embed="rId2"/>
-          <a:stretch>
-            <a:fillRect/>
-          </a:stretch>
-        </p:blipFill>
-        <p:spPr>
-          <a:xfrm>
-            <a:off x="0" y="0"/>
-            <a:ext cx="12191999" cy="6858000"/>
-          </a:xfrm>
-          <a:prstGeom prst="rect">
-            <a:avLst/>
-          </a:prstGeom>
-        </p:spPr>
-      </p:pic>
-    </p:spTree>
-  </p:cSld>
-  <p:clrMapOvr>
-    <a:masterClrMapping/>
-  </p:clrMapOvr>
-  <p:timing>
-    <p:tnLst>
-      <p:par>
-        <p:cTn id="1" dur="indefinite" restart="never" nodeType="tmRoot"/>
-      </p:par>
-    </p:tnLst>
-  </p:timing>
-</p:sld>
-</file>
-
 <file path=ppt/slides/slide3.xml><?xml version="1.0" encoding="utf-8"?>
 <p:sld xmlns:a="http://schemas.openxmlformats.org/drawingml/2006/main" xmlns:r="http://schemas.openxmlformats.org/officeDocument/2006/relationships" xmlns:p="http://schemas.openxmlformats.org/presentationml/2006/main">
   <p:cSld>
@@ -3441,24 +4812,371 @@
           <a:chExt cx="0" cy="0"/>
         </a:xfrm>
       </p:grpSpPr>
+      <p:sp>
+        <p:nvSpPr>
+          <p:cNvPr id="2" name="TextBox 1"/>
+          <p:cNvSpPr txBox="1"/>
+          <p:nvPr/>
+        </p:nvSpPr>
+        <p:spPr>
+          <a:xfrm>
+            <a:off x="502920" y="320040"/>
+            <a:ext cx="11064240" cy="640080"/>
+          </a:xfrm>
+          <a:prstGeom prst="rect">
+            <a:avLst/>
+          </a:prstGeom>
+          <a:noFill/>
+        </p:spPr>
+        <p:txBody>
+          <a:bodyPr wrap="square" lIns="0" tIns="0" rIns="0" bIns="0">
+            <a:spAutoFit/>
+          </a:bodyPr>
+          <a:lstStyle/>
+          <a:p>
+            <a:pPr>
+              <a:defRPr sz="3200" b="1">
+                <a:solidFill>
+                  <a:srgbClr val="1A2530"/>
+                </a:solidFill>
+                <a:latin typeface="Arial"/>
+              </a:defRPr>
+            </a:pPr>
+            <a:r>
+              <a:rPr sz="2500" b="1">
+                <a:solidFill>
+                  <a:srgbClr val="16223C"/>
+                </a:solidFill>
+                <a:latin typeface="Aptos"/>
+              </a:rPr>
+              <a:t>The Architectural ADC Pipeline</a:t>
+            </a:r>
+          </a:p>
+        </p:txBody>
+      </p:sp>
+      <p:sp>
+        <p:nvSpPr>
+          <p:cNvPr id="3" name="TextBox 2"/>
+          <p:cNvSpPr txBox="1"/>
+          <p:nvPr/>
+        </p:nvSpPr>
+        <p:spPr>
+          <a:xfrm>
+            <a:off x="594359" y="1143000"/>
+            <a:ext cx="9826897" cy="5120640"/>
+          </a:xfrm>
+          <a:prstGeom prst="rect">
+            <a:avLst/>
+          </a:prstGeom>
+          <a:noFill/>
+        </p:spPr>
+        <p:txBody>
+          <a:bodyPr wrap="square" lIns="0" tIns="0" rIns="0" bIns="0">
+            <a:normAutofit/>
+          </a:bodyPr>
+          <a:lstStyle/>
+          <a:p>
+            <a:pPr>
+              <a:spcAft>
+                <a:spcPts val="700"/>
+              </a:spcAft>
+              <a:defRPr sz="1800">
+                <a:solidFill>
+                  <a:srgbClr val="1A2530"/>
+                </a:solidFill>
+                <a:latin typeface="Arial"/>
+              </a:defRPr>
+            </a:pPr>
+            <a:r>
+              <a:rPr sz="1400" dirty="0">
+                <a:solidFill>
+                  <a:srgbClr val="5D5E67"/>
+                </a:solidFill>
+                <a:latin typeface="Aptos"/>
+              </a:rPr>
+              <a:t>Acoustic Input: Physical sound pressure waves vibrate a microphone diaphragm, generating low-voltage electrical signals.</a:t>
+            </a:r>
+          </a:p>
+          <a:p>
+            <a:pPr>
+              <a:spcAft>
+                <a:spcPts val="700"/>
+              </a:spcAft>
+              <a:defRPr sz="1800">
+                <a:solidFill>
+                  <a:srgbClr val="1A2530"/>
+                </a:solidFill>
+                <a:latin typeface="Arial"/>
+              </a:defRPr>
+            </a:pPr>
+            <a:r>
+              <a:rPr sz="1400" dirty="0">
+                <a:solidFill>
+                  <a:srgbClr val="5D5E67"/>
+                </a:solidFill>
+                <a:latin typeface="Aptos"/>
+              </a:rPr>
+              <a:t>Pre-Amplification: The low-voltage microphone signal is boosted to a clean, usable line-level hardware voltage.</a:t>
+            </a:r>
+          </a:p>
+          <a:p>
+            <a:pPr>
+              <a:spcAft>
+                <a:spcPts val="700"/>
+              </a:spcAft>
+              <a:defRPr sz="1800">
+                <a:solidFill>
+                  <a:srgbClr val="1A2530"/>
+                </a:solidFill>
+                <a:latin typeface="Arial"/>
+              </a:defRPr>
+            </a:pPr>
+            <a:r>
+              <a:rPr sz="1400" dirty="0">
+                <a:solidFill>
+                  <a:srgbClr val="5D5E67"/>
+                </a:solidFill>
+                <a:latin typeface="Aptos"/>
+              </a:rPr>
+              <a:t>Anti-Aliasing Filter: A low-pass hardware filter violently strips away all frequencies above the chosen system limit.</a:t>
+            </a:r>
+          </a:p>
+          <a:p>
+            <a:pPr>
+              <a:spcAft>
+                <a:spcPts val="700"/>
+              </a:spcAft>
+              <a:defRPr sz="1800">
+                <a:solidFill>
+                  <a:srgbClr val="1A2530"/>
+                </a:solidFill>
+                <a:latin typeface="Arial"/>
+              </a:defRPr>
+            </a:pPr>
+            <a:r>
+              <a:rPr sz="1400" dirty="0">
+                <a:solidFill>
+                  <a:srgbClr val="5D5E67"/>
+                </a:solidFill>
+                <a:latin typeface="Aptos"/>
+              </a:rPr>
+              <a:t>The ADC Chip: The core integrated circuit handles both Sampling (chopping time) and </a:t>
+            </a:r>
+            <a:r>
+              <a:rPr sz="1400" dirty="0" err="1">
+                <a:solidFill>
+                  <a:srgbClr val="5D5E67"/>
+                </a:solidFill>
+                <a:latin typeface="Aptos"/>
+              </a:rPr>
+              <a:t>Quantisation</a:t>
+            </a:r>
+            <a:r>
+              <a:rPr sz="1400" dirty="0">
+                <a:solidFill>
+                  <a:srgbClr val="5D5E67"/>
+                </a:solidFill>
+                <a:latin typeface="Aptos"/>
+              </a:rPr>
+              <a:t> (chopping amplitude).</a:t>
+            </a:r>
+          </a:p>
+          <a:p>
+            <a:pPr>
+              <a:spcAft>
+                <a:spcPts val="700"/>
+              </a:spcAft>
+              <a:defRPr sz="1800">
+                <a:solidFill>
+                  <a:srgbClr val="1A2530"/>
+                </a:solidFill>
+                <a:latin typeface="Arial"/>
+              </a:defRPr>
+            </a:pPr>
+            <a:r>
+              <a:rPr sz="1400" dirty="0">
+                <a:solidFill>
+                  <a:srgbClr val="5D5E67"/>
+                </a:solidFill>
+                <a:latin typeface="Aptos"/>
+              </a:rPr>
+              <a:t>Storage &amp; Packaging: The resulting structural binary stream is written directly into uncompressed .wav file containers.</a:t>
+            </a:r>
+          </a:p>
+        </p:txBody>
+      </p:sp>
+      <p:sp>
+        <p:nvSpPr>
+          <p:cNvPr id="4" name="Rectangle 3"/>
+          <p:cNvSpPr/>
+          <p:nvPr/>
+        </p:nvSpPr>
+        <p:spPr>
+          <a:xfrm>
+            <a:off x="0" y="0"/>
+            <a:ext cx="109728" cy="6858000"/>
+          </a:xfrm>
+          <a:prstGeom prst="rect">
+            <a:avLst/>
+          </a:prstGeom>
+          <a:solidFill>
+            <a:srgbClr val="684AA8"/>
+          </a:solidFill>
+          <a:ln>
+            <a:noFill/>
+          </a:ln>
+        </p:spPr>
+        <p:style>
+          <a:lnRef idx="1">
+            <a:schemeClr val="accent1"/>
+          </a:lnRef>
+          <a:fillRef idx="3">
+            <a:schemeClr val="accent1"/>
+          </a:fillRef>
+          <a:effectRef idx="2">
+            <a:schemeClr val="accent1"/>
+          </a:effectRef>
+          <a:fontRef idx="minor">
+            <a:schemeClr val="lt1"/>
+          </a:fontRef>
+        </p:style>
+        <p:txBody>
+          <a:bodyPr rtlCol="0" anchor="ctr"/>
+          <a:lstStyle/>
+          <a:p>
+            <a:pPr algn="ctr"/>
+            <a:endParaRPr/>
+          </a:p>
+        </p:txBody>
+      </p:sp>
+      <p:sp>
+        <p:nvSpPr>
+          <p:cNvPr id="5" name="Rounded Rectangle 4"/>
+          <p:cNvSpPr/>
+          <p:nvPr/>
+        </p:nvSpPr>
+        <p:spPr>
+          <a:xfrm>
+            <a:off x="594360" y="2794000"/>
+            <a:ext cx="11064240" cy="3561079"/>
+          </a:xfrm>
+          <a:prstGeom prst="roundRect">
+            <a:avLst/>
+          </a:prstGeom>
+          <a:solidFill>
+            <a:srgbClr val="F7F5FA"/>
+          </a:solidFill>
+          <a:ln w="12700">
+            <a:solidFill>
+              <a:srgbClr val="DAD5E2"/>
+            </a:solidFill>
+          </a:ln>
+        </p:spPr>
+        <p:style>
+          <a:lnRef idx="1">
+            <a:schemeClr val="accent1"/>
+          </a:lnRef>
+          <a:fillRef idx="3">
+            <a:schemeClr val="accent1"/>
+          </a:fillRef>
+          <a:effectRef idx="2">
+            <a:schemeClr val="accent1"/>
+          </a:effectRef>
+          <a:fontRef idx="minor">
+            <a:schemeClr val="lt1"/>
+          </a:fontRef>
+        </p:style>
+        <p:txBody>
+          <a:bodyPr rtlCol="0" anchor="ctr"/>
+          <a:lstStyle/>
+          <a:p>
+            <a:pPr algn="ctr"/>
+            <a:endParaRPr/>
+          </a:p>
+        </p:txBody>
+      </p:sp>
       <p:pic>
         <p:nvPicPr>
-          <p:cNvPr id="2" name="Picture 1" descr="slide_03.png"/>
+          <p:cNvPr id="6" name="Picture 5" descr="slide03.png"/>
+          <p:cNvPicPr>
+            <a:picLocks noChangeAspect="1"/>
+          </p:cNvPicPr>
+          <p:nvPr/>
+        </p:nvPicPr>
+        <p:blipFill rotWithShape="1">
+          <a:blip r:embed="rId2"/>
+          <a:srcRect b="69674"/>
+          <a:stretch/>
+        </p:blipFill>
+        <p:spPr>
+          <a:xfrm>
+            <a:off x="1528935" y="4000189"/>
+            <a:ext cx="5263752" cy="680668"/>
+          </a:xfrm>
+          <a:prstGeom prst="rect">
+            <a:avLst/>
+          </a:prstGeom>
+        </p:spPr>
+      </p:pic>
+      <p:sp>
+        <p:nvSpPr>
+          <p:cNvPr id="7" name="TextBox 6"/>
+          <p:cNvSpPr txBox="1"/>
+          <p:nvPr/>
+        </p:nvSpPr>
+        <p:spPr>
+          <a:xfrm>
+            <a:off x="6492240" y="5989320"/>
+            <a:ext cx="4937760" cy="274320"/>
+          </a:xfrm>
+          <a:prstGeom prst="rect">
+            <a:avLst/>
+          </a:prstGeom>
+          <a:noFill/>
+        </p:spPr>
+        <p:txBody>
+          <a:bodyPr wrap="none">
+            <a:spAutoFit/>
+          </a:bodyPr>
+          <a:lstStyle/>
+          <a:p>
+            <a:pPr algn="r"/>
+            <a:r>
+              <a:rPr sz="900">
+                <a:solidFill>
+                  <a:srgbClr val="5D5E67"/>
+                </a:solidFill>
+                <a:latin typeface="Aptos"/>
+              </a:rPr>
+              <a:t>Concept diagram</a:t>
+            </a:r>
+          </a:p>
+        </p:txBody>
+      </p:sp>
+      <p:pic>
+        <p:nvPicPr>
+          <p:cNvPr id="8" name="Picture 7"/>
           <p:cNvPicPr>
             <a:picLocks noChangeAspect="1"/>
           </p:cNvPicPr>
           <p:nvPr/>
         </p:nvPicPr>
         <p:blipFill>
-          <a:blip r:embed="rId2"/>
+          <a:blip r:embed="rId3">
+            <a:extLst>
+              <a:ext uri="{28A0092B-C50C-407E-A947-70E740481C1C}">
+                <a14:useLocalDpi xmlns:a14="http://schemas.microsoft.com/office/drawing/2010/main" val="0"/>
+              </a:ext>
+            </a:extLst>
+          </a:blip>
           <a:stretch>
             <a:fillRect/>
           </a:stretch>
         </p:blipFill>
         <p:spPr>
           <a:xfrm>
-            <a:off x="0" y="0"/>
-            <a:ext cx="12191999" cy="6858000"/>
+            <a:off x="283029" y="2628563"/>
+            <a:ext cx="11860203" cy="4151071"/>
           </a:xfrm>
           <a:prstGeom prst="rect">
             <a:avLst/>
@@ -3466,17 +5184,15 @@
         </p:spPr>
       </p:pic>
     </p:spTree>
+    <p:extLst>
+      <p:ext uri="{BB962C8B-B14F-4D97-AF65-F5344CB8AC3E}">
+        <p14:creationId xmlns:p14="http://schemas.microsoft.com/office/powerpoint/2010/main" val="1870180703"/>
+      </p:ext>
+    </p:extLst>
   </p:cSld>
   <p:clrMapOvr>
     <a:masterClrMapping/>
   </p:clrMapOvr>
-  <p:timing>
-    <p:tnLst>
-      <p:par>
-        <p:cTn id="1" dur="indefinite" restart="never" nodeType="tmRoot"/>
-      </p:par>
-    </p:tnLst>
-  </p:timing>
 </p:sld>
 </file>
 
@@ -3497,9 +5213,252 @@
           <a:chExt cx="0" cy="0"/>
         </a:xfrm>
       </p:grpSpPr>
+      <p:sp>
+        <p:nvSpPr>
+          <p:cNvPr id="2" name="TextBox 1"/>
+          <p:cNvSpPr txBox="1"/>
+          <p:nvPr/>
+        </p:nvSpPr>
+        <p:spPr>
+          <a:xfrm>
+            <a:off x="502920" y="320040"/>
+            <a:ext cx="11064240" cy="640080"/>
+          </a:xfrm>
+          <a:prstGeom prst="rect">
+            <a:avLst/>
+          </a:prstGeom>
+          <a:noFill/>
+        </p:spPr>
+        <p:txBody>
+          <a:bodyPr wrap="square" lIns="0" tIns="0" rIns="0" bIns="0">
+            <a:spAutoFit/>
+          </a:bodyPr>
+          <a:lstStyle/>
+          <a:p>
+            <a:pPr>
+              <a:defRPr sz="3200" b="1">
+                <a:solidFill>
+                  <a:srgbClr val="1A2530"/>
+                </a:solidFill>
+                <a:latin typeface="Arial"/>
+              </a:defRPr>
+            </a:pPr>
+            <a:r>
+              <a:rPr sz="2500" b="1">
+                <a:solidFill>
+                  <a:srgbClr val="16223C"/>
+                </a:solidFill>
+                <a:latin typeface="Aptos"/>
+              </a:rPr>
+              <a:t>Step 1: Time Discretisation (Sampling)</a:t>
+            </a:r>
+          </a:p>
+        </p:txBody>
+      </p:sp>
+      <p:sp>
+        <p:nvSpPr>
+          <p:cNvPr id="3" name="TextBox 2"/>
+          <p:cNvSpPr txBox="1"/>
+          <p:nvPr/>
+        </p:nvSpPr>
+        <p:spPr>
+          <a:xfrm>
+            <a:off x="594360" y="1143000"/>
+            <a:ext cx="5486400" cy="5120640"/>
+          </a:xfrm>
+          <a:prstGeom prst="rect">
+            <a:avLst/>
+          </a:prstGeom>
+          <a:noFill/>
+        </p:spPr>
+        <p:txBody>
+          <a:bodyPr wrap="square" lIns="0" tIns="0" rIns="0" bIns="0">
+            <a:normAutofit/>
+          </a:bodyPr>
+          <a:lstStyle/>
+          <a:p>
+            <a:pPr>
+              <a:spcAft>
+                <a:spcPts val="700"/>
+              </a:spcAft>
+              <a:defRPr sz="1800">
+                <a:solidFill>
+                  <a:srgbClr val="1A2530"/>
+                </a:solidFill>
+                <a:latin typeface="Arial"/>
+              </a:defRPr>
+            </a:pPr>
+            <a:r>
+              <a:rPr>
+                <a:solidFill>
+                  <a:srgbClr val="5D5E67"/>
+                </a:solidFill>
+                <a:latin typeface="Aptos"/>
+              </a:rPr>
+              <a:t>Definition: Measuring the exact instantaneous voltage of an analog signal at uniform, highly precise intervals of time.</a:t>
+            </a:r>
+          </a:p>
+          <a:p>
+            <a:pPr>
+              <a:spcAft>
+                <a:spcPts val="700"/>
+              </a:spcAft>
+              <a:defRPr sz="1800">
+                <a:solidFill>
+                  <a:srgbClr val="1A2530"/>
+                </a:solidFill>
+                <a:latin typeface="Arial"/>
+              </a:defRPr>
+            </a:pPr>
+            <a:r>
+              <a:rPr>
+                <a:solidFill>
+                  <a:srgbClr val="5D5E67"/>
+                </a:solidFill>
+                <a:latin typeface="Aptos"/>
+              </a:rPr>
+              <a:t>Sampling Interval (Ts): The fixed, unvarying time duration separating consecutive signal measurements.</a:t>
+            </a:r>
+          </a:p>
+          <a:p>
+            <a:pPr>
+              <a:spcAft>
+                <a:spcPts val="700"/>
+              </a:spcAft>
+              <a:defRPr sz="1800">
+                <a:solidFill>
+                  <a:srgbClr val="1A2530"/>
+                </a:solidFill>
+                <a:latin typeface="Arial"/>
+              </a:defRPr>
+            </a:pPr>
+            <a:r>
+              <a:rPr>
+                <a:solidFill>
+                  <a:srgbClr val="5D5E67"/>
+                </a:solidFill>
+                <a:latin typeface="Aptos"/>
+              </a:rPr>
+              <a:t>Sampling Frequency (fs): The total number of snapshots captured per single second, measured strictly in Hertz (Hz).</a:t>
+            </a:r>
+          </a:p>
+          <a:p>
+            <a:pPr>
+              <a:spcAft>
+                <a:spcPts val="700"/>
+              </a:spcAft>
+              <a:defRPr sz="1800">
+                <a:solidFill>
+                  <a:srgbClr val="1A2530"/>
+                </a:solidFill>
+                <a:latin typeface="Arial"/>
+              </a:defRPr>
+            </a:pPr>
+            <a:r>
+              <a:rPr>
+                <a:solidFill>
+                  <a:srgbClr val="5D5E67"/>
+                </a:solidFill>
+                <a:latin typeface="Aptos"/>
+              </a:rPr>
+              <a:t>Mathematical Transformation: Maps a continuous-time signal x(t) into a discrete sequence defined as x[n] = x(nTs).</a:t>
+            </a:r>
+          </a:p>
+        </p:txBody>
+      </p:sp>
+      <p:sp>
+        <p:nvSpPr>
+          <p:cNvPr id="4" name="Rectangle 3"/>
+          <p:cNvSpPr/>
+          <p:nvPr/>
+        </p:nvSpPr>
+        <p:spPr>
+          <a:xfrm>
+            <a:off x="0" y="0"/>
+            <a:ext cx="109728" cy="6858000"/>
+          </a:xfrm>
+          <a:prstGeom prst="rect">
+            <a:avLst/>
+          </a:prstGeom>
+          <a:solidFill>
+            <a:srgbClr val="684AA8"/>
+          </a:solidFill>
+          <a:ln>
+            <a:noFill/>
+          </a:ln>
+        </p:spPr>
+        <p:style>
+          <a:lnRef idx="1">
+            <a:schemeClr val="accent1"/>
+          </a:lnRef>
+          <a:fillRef idx="3">
+            <a:schemeClr val="accent1"/>
+          </a:fillRef>
+          <a:effectRef idx="2">
+            <a:schemeClr val="accent1"/>
+          </a:effectRef>
+          <a:fontRef idx="minor">
+            <a:schemeClr val="lt1"/>
+          </a:fontRef>
+        </p:style>
+        <p:txBody>
+          <a:bodyPr rtlCol="0" anchor="ctr"/>
+          <a:lstStyle/>
+          <a:p>
+            <a:pPr algn="ctr"/>
+            <a:endParaRPr/>
+          </a:p>
+        </p:txBody>
+      </p:sp>
+      <p:sp>
+        <p:nvSpPr>
+          <p:cNvPr id="5" name="Rounded Rectangle 4"/>
+          <p:cNvSpPr/>
+          <p:nvPr/>
+        </p:nvSpPr>
+        <p:spPr>
+          <a:xfrm>
+            <a:off x="6309360" y="1143000"/>
+            <a:ext cx="5349240" cy="5212080"/>
+          </a:xfrm>
+          <a:prstGeom prst="roundRect">
+            <a:avLst/>
+          </a:prstGeom>
+          <a:solidFill>
+            <a:srgbClr val="F7F5FA"/>
+          </a:solidFill>
+          <a:ln w="12700">
+            <a:solidFill>
+              <a:srgbClr val="DAD5E2"/>
+            </a:solidFill>
+          </a:ln>
+        </p:spPr>
+        <p:style>
+          <a:lnRef idx="1">
+            <a:schemeClr val="accent1"/>
+          </a:lnRef>
+          <a:fillRef idx="3">
+            <a:schemeClr val="accent1"/>
+          </a:fillRef>
+          <a:effectRef idx="2">
+            <a:schemeClr val="accent1"/>
+          </a:effectRef>
+          <a:fontRef idx="minor">
+            <a:schemeClr val="lt1"/>
+          </a:fontRef>
+        </p:style>
+        <p:txBody>
+          <a:bodyPr rtlCol="0" anchor="ctr"/>
+          <a:lstStyle/>
+          <a:p>
+            <a:pPr algn="ctr"/>
+            <a:endParaRPr/>
+          </a:p>
+        </p:txBody>
+      </p:sp>
       <p:pic>
         <p:nvPicPr>
-          <p:cNvPr id="2" name="Picture 1" descr="slide_04.png"/>
+          <p:cNvPr id="6" name="Picture 5" descr="slide04.png"/>
           <p:cNvPicPr>
             <a:picLocks noChangeAspect="1"/>
           </p:cNvPicPr>
@@ -3513,26 +5472,59 @@
         </p:blipFill>
         <p:spPr>
           <a:xfrm>
-            <a:off x="0" y="0"/>
-            <a:ext cx="12191999" cy="6858000"/>
+            <a:off x="6537960" y="1417320"/>
+            <a:ext cx="4892040" cy="3491476"/>
           </a:xfrm>
           <a:prstGeom prst="rect">
             <a:avLst/>
           </a:prstGeom>
         </p:spPr>
       </p:pic>
+      <p:sp>
+        <p:nvSpPr>
+          <p:cNvPr id="7" name="TextBox 6"/>
+          <p:cNvSpPr txBox="1"/>
+          <p:nvPr/>
+        </p:nvSpPr>
+        <p:spPr>
+          <a:xfrm>
+            <a:off x="6492240" y="5989320"/>
+            <a:ext cx="4937760" cy="274320"/>
+          </a:xfrm>
+          <a:prstGeom prst="rect">
+            <a:avLst/>
+          </a:prstGeom>
+          <a:noFill/>
+        </p:spPr>
+        <p:txBody>
+          <a:bodyPr wrap="none">
+            <a:spAutoFit/>
+          </a:bodyPr>
+          <a:lstStyle/>
+          <a:p>
+            <a:pPr algn="r"/>
+            <a:r>
+              <a:rPr sz="900">
+                <a:solidFill>
+                  <a:srgbClr val="5D5E67"/>
+                </a:solidFill>
+                <a:latin typeface="Aptos"/>
+              </a:rPr>
+              <a:t>Concept diagram</a:t>
+            </a:r>
+          </a:p>
+        </p:txBody>
+      </p:sp>
     </p:spTree>
+    <p:extLst>
+      <p:ext uri="{BB962C8B-B14F-4D97-AF65-F5344CB8AC3E}">
+        <p14:creationId xmlns:p14="http://schemas.microsoft.com/office/powerpoint/2010/main" val="1620467667"/>
+      </p:ext>
+    </p:extLst>
   </p:cSld>
   <p:clrMapOvr>
     <a:masterClrMapping/>
   </p:clrMapOvr>
-  <p:timing>
-    <p:tnLst>
-      <p:par>
-        <p:cTn id="1" dur="indefinite" restart="never" nodeType="tmRoot"/>
-      </p:par>
-    </p:tnLst>
-  </p:timing>
 </p:sld>
 </file>
 
@@ -3553,9 +5545,285 @@
           <a:chExt cx="0" cy="0"/>
         </a:xfrm>
       </p:grpSpPr>
+      <p:sp>
+        <p:nvSpPr>
+          <p:cNvPr id="2" name="TextBox 1"/>
+          <p:cNvSpPr txBox="1"/>
+          <p:nvPr/>
+        </p:nvSpPr>
+        <p:spPr>
+          <a:xfrm>
+            <a:off x="502920" y="320040"/>
+            <a:ext cx="11064240" cy="640080"/>
+          </a:xfrm>
+          <a:prstGeom prst="rect">
+            <a:avLst/>
+          </a:prstGeom>
+          <a:noFill/>
+        </p:spPr>
+        <p:txBody>
+          <a:bodyPr wrap="square" lIns="0" tIns="0" rIns="0" bIns="0">
+            <a:spAutoFit/>
+          </a:bodyPr>
+          <a:lstStyle/>
+          <a:p>
+            <a:pPr>
+              <a:defRPr sz="3200" b="1">
+                <a:solidFill>
+                  <a:srgbClr val="1A2530"/>
+                </a:solidFill>
+                <a:latin typeface="Arial"/>
+              </a:defRPr>
+            </a:pPr>
+            <a:r>
+              <a:rPr sz="2500" b="1">
+                <a:solidFill>
+                  <a:srgbClr val="16223C"/>
+                </a:solidFill>
+                <a:latin typeface="Aptos"/>
+              </a:rPr>
+              <a:t>The Nyquist-Shannon Sampling Theorem</a:t>
+            </a:r>
+          </a:p>
+        </p:txBody>
+      </p:sp>
+      <p:sp>
+        <p:nvSpPr>
+          <p:cNvPr id="3" name="TextBox 2"/>
+          <p:cNvSpPr txBox="1"/>
+          <p:nvPr/>
+        </p:nvSpPr>
+        <p:spPr>
+          <a:xfrm>
+            <a:off x="594360" y="1143000"/>
+            <a:ext cx="5486400" cy="5120640"/>
+          </a:xfrm>
+          <a:prstGeom prst="rect">
+            <a:avLst/>
+          </a:prstGeom>
+          <a:noFill/>
+        </p:spPr>
+        <p:txBody>
+          <a:bodyPr wrap="square" lIns="0" tIns="0" rIns="0" bIns="0">
+            <a:normAutofit/>
+          </a:bodyPr>
+          <a:lstStyle/>
+          <a:p>
+            <a:pPr>
+              <a:spcAft>
+                <a:spcPts val="700"/>
+              </a:spcAft>
+              <a:defRPr sz="1800">
+                <a:solidFill>
+                  <a:srgbClr val="1A2530"/>
+                </a:solidFill>
+                <a:latin typeface="Arial"/>
+              </a:defRPr>
+            </a:pPr>
+            <a:r>
+              <a:rPr dirty="0">
+                <a:solidFill>
+                  <a:srgbClr val="5D5E67"/>
+                </a:solidFill>
+                <a:latin typeface="Aptos"/>
+              </a:rPr>
+              <a:t>The Fundamental Rule: To perfectly reconstruct an analog signal, the sampling rate (fs) must be greater than twice the highest frequency component (</a:t>
+            </a:r>
+            <a:r>
+              <a:rPr dirty="0" err="1">
+                <a:solidFill>
+                  <a:srgbClr val="5D5E67"/>
+                </a:solidFill>
+                <a:latin typeface="Aptos"/>
+              </a:rPr>
+              <a:t>fmax</a:t>
+            </a:r>
+            <a:r>
+              <a:rPr dirty="0">
+                <a:solidFill>
+                  <a:srgbClr val="5D5E67"/>
+                </a:solidFill>
+                <a:latin typeface="Aptos"/>
+              </a:rPr>
+              <a:t>) contained within the signal.</a:t>
+            </a:r>
+          </a:p>
+          <a:p>
+            <a:pPr>
+              <a:spcAft>
+                <a:spcPts val="700"/>
+              </a:spcAft>
+              <a:defRPr sz="1800">
+                <a:solidFill>
+                  <a:srgbClr val="1A2530"/>
+                </a:solidFill>
+                <a:latin typeface="Arial"/>
+              </a:defRPr>
+            </a:pPr>
+            <a:r>
+              <a:rPr dirty="0">
+                <a:solidFill>
+                  <a:srgbClr val="5D5E67"/>
+                </a:solidFill>
+                <a:latin typeface="Aptos"/>
+              </a:rPr>
+              <a:t>The Formula: fs &gt;= 2 * </a:t>
+            </a:r>
+            <a:r>
+              <a:rPr dirty="0" err="1">
+                <a:solidFill>
+                  <a:srgbClr val="5D5E67"/>
+                </a:solidFill>
+                <a:latin typeface="Aptos"/>
+              </a:rPr>
+              <a:t>fmax</a:t>
+            </a:r>
+            <a:endParaRPr dirty="0">
+              <a:solidFill>
+                <a:srgbClr val="5D5E67"/>
+              </a:solidFill>
+              <a:latin typeface="Aptos"/>
+            </a:endParaRPr>
+          </a:p>
+          <a:p>
+            <a:pPr>
+              <a:spcAft>
+                <a:spcPts val="700"/>
+              </a:spcAft>
+              <a:defRPr sz="1800">
+                <a:solidFill>
+                  <a:srgbClr val="1A2530"/>
+                </a:solidFill>
+                <a:latin typeface="Arial"/>
+              </a:defRPr>
+            </a:pPr>
+            <a:r>
+              <a:rPr dirty="0">
+                <a:solidFill>
+                  <a:srgbClr val="5D5E67"/>
+                </a:solidFill>
+                <a:latin typeface="Aptos"/>
+              </a:rPr>
+              <a:t>Nyquist Frequency: The absolute mathematical frequency ceiling of a digital system, equal to exactly half the sampling rate (fs / 2).</a:t>
+            </a:r>
+          </a:p>
+          <a:p>
+            <a:pPr>
+              <a:spcAft>
+                <a:spcPts val="700"/>
+              </a:spcAft>
+              <a:defRPr sz="1800">
+                <a:solidFill>
+                  <a:srgbClr val="1A2530"/>
+                </a:solidFill>
+                <a:latin typeface="Arial"/>
+              </a:defRPr>
+            </a:pPr>
+            <a:r>
+              <a:rPr dirty="0">
+                <a:solidFill>
+                  <a:srgbClr val="5D5E67"/>
+                </a:solidFill>
+                <a:latin typeface="Aptos"/>
+              </a:rPr>
+              <a:t>Reconstruction: If this condition is met, the original wave can be rebuilt with zero mathematical loss or structural interpolation errors.</a:t>
+            </a:r>
+          </a:p>
+        </p:txBody>
+      </p:sp>
+      <p:sp>
+        <p:nvSpPr>
+          <p:cNvPr id="4" name="Rectangle 3"/>
+          <p:cNvSpPr/>
+          <p:nvPr/>
+        </p:nvSpPr>
+        <p:spPr>
+          <a:xfrm>
+            <a:off x="0" y="0"/>
+            <a:ext cx="109728" cy="6858000"/>
+          </a:xfrm>
+          <a:prstGeom prst="rect">
+            <a:avLst/>
+          </a:prstGeom>
+          <a:solidFill>
+            <a:srgbClr val="684AA8"/>
+          </a:solidFill>
+          <a:ln>
+            <a:noFill/>
+          </a:ln>
+        </p:spPr>
+        <p:style>
+          <a:lnRef idx="1">
+            <a:schemeClr val="accent1"/>
+          </a:lnRef>
+          <a:fillRef idx="3">
+            <a:schemeClr val="accent1"/>
+          </a:fillRef>
+          <a:effectRef idx="2">
+            <a:schemeClr val="accent1"/>
+          </a:effectRef>
+          <a:fontRef idx="minor">
+            <a:schemeClr val="lt1"/>
+          </a:fontRef>
+        </p:style>
+        <p:txBody>
+          <a:bodyPr rtlCol="0" anchor="ctr"/>
+          <a:lstStyle/>
+          <a:p>
+            <a:pPr algn="ctr"/>
+            <a:endParaRPr/>
+          </a:p>
+        </p:txBody>
+      </p:sp>
+      <p:sp>
+        <p:nvSpPr>
+          <p:cNvPr id="5" name="Rounded Rectangle 4"/>
+          <p:cNvSpPr/>
+          <p:nvPr/>
+        </p:nvSpPr>
+        <p:spPr>
+          <a:xfrm>
+            <a:off x="6309360" y="1143000"/>
+            <a:ext cx="5349240" cy="5212080"/>
+          </a:xfrm>
+          <a:prstGeom prst="roundRect">
+            <a:avLst/>
+          </a:prstGeom>
+          <a:solidFill>
+            <a:srgbClr val="F7F5FA"/>
+          </a:solidFill>
+          <a:ln w="12700">
+            <a:solidFill>
+              <a:srgbClr val="DAD5E2"/>
+            </a:solidFill>
+          </a:ln>
+        </p:spPr>
+        <p:style>
+          <a:lnRef idx="1">
+            <a:schemeClr val="accent1"/>
+          </a:lnRef>
+          <a:fillRef idx="3">
+            <a:schemeClr val="accent1"/>
+          </a:fillRef>
+          <a:effectRef idx="2">
+            <a:schemeClr val="accent1"/>
+          </a:effectRef>
+          <a:fontRef idx="minor">
+            <a:schemeClr val="lt1"/>
+          </a:fontRef>
+        </p:style>
+        <p:txBody>
+          <a:bodyPr rtlCol="0" anchor="ctr"/>
+          <a:lstStyle/>
+          <a:p>
+            <a:pPr algn="ctr"/>
+            <a:endParaRPr/>
+          </a:p>
+        </p:txBody>
+      </p:sp>
       <p:pic>
         <p:nvPicPr>
-          <p:cNvPr id="2" name="Picture 1" descr="slide_05.png"/>
+          <p:cNvPr id="6" name="Picture 5" descr="slide05.png"/>
           <p:cNvPicPr>
             <a:picLocks noChangeAspect="1"/>
           </p:cNvPicPr>
@@ -3569,50 +5837,59 @@
         </p:blipFill>
         <p:spPr>
           <a:xfrm>
-            <a:off x="0" y="0"/>
-            <a:ext cx="12191999" cy="6858000"/>
+            <a:off x="6537960" y="1417320"/>
+            <a:ext cx="4892040" cy="3567535"/>
           </a:xfrm>
           <a:prstGeom prst="rect">
             <a:avLst/>
           </a:prstGeom>
         </p:spPr>
       </p:pic>
-      <p:pic>
-        <p:nvPicPr>
-          <p:cNvPr id="3" name="Picture 2"/>
-          <p:cNvPicPr>
-            <a:picLocks noChangeAspect="1"/>
-          </p:cNvPicPr>
+      <p:sp>
+        <p:nvSpPr>
+          <p:cNvPr id="7" name="TextBox 6"/>
+          <p:cNvSpPr txBox="1"/>
           <p:nvPr/>
-        </p:nvPicPr>
-        <p:blipFill>
-          <a:blip r:embed="rId3"/>
-          <a:stretch>
-            <a:fillRect/>
-          </a:stretch>
-        </p:blipFill>
-        <p:spPr>
-          <a:xfrm>
-            <a:off x="8320080" y="-91408"/>
-            <a:ext cx="3443749" cy="3865122"/>
+        </p:nvSpPr>
+        <p:spPr>
+          <a:xfrm>
+            <a:off x="6492240" y="5989320"/>
+            <a:ext cx="4937760" cy="274320"/>
           </a:xfrm>
           <a:prstGeom prst="rect">
             <a:avLst/>
           </a:prstGeom>
-        </p:spPr>
-      </p:pic>
+          <a:noFill/>
+        </p:spPr>
+        <p:txBody>
+          <a:bodyPr wrap="none">
+            <a:spAutoFit/>
+          </a:bodyPr>
+          <a:lstStyle/>
+          <a:p>
+            <a:pPr algn="r"/>
+            <a:r>
+              <a:rPr sz="900">
+                <a:solidFill>
+                  <a:srgbClr val="5D5E67"/>
+                </a:solidFill>
+                <a:latin typeface="Aptos"/>
+              </a:rPr>
+              <a:t>Concept diagram</a:t>
+            </a:r>
+          </a:p>
+        </p:txBody>
+      </p:sp>
     </p:spTree>
+    <p:extLst>
+      <p:ext uri="{BB962C8B-B14F-4D97-AF65-F5344CB8AC3E}">
+        <p14:creationId xmlns:p14="http://schemas.microsoft.com/office/powerpoint/2010/main" val="511524743"/>
+      </p:ext>
+    </p:extLst>
   </p:cSld>
   <p:clrMapOvr>
     <a:masterClrMapping/>
   </p:clrMapOvr>
-  <p:timing>
-    <p:tnLst>
-      <p:par>
-        <p:cTn id="1" dur="indefinite" restart="never" nodeType="tmRoot"/>
-      </p:par>
-    </p:tnLst>
-  </p:timing>
 </p:sld>
 </file>
 
@@ -3633,9 +5910,252 @@
           <a:chExt cx="0" cy="0"/>
         </a:xfrm>
       </p:grpSpPr>
+      <p:sp>
+        <p:nvSpPr>
+          <p:cNvPr id="2" name="TextBox 1"/>
+          <p:cNvSpPr txBox="1"/>
+          <p:nvPr/>
+        </p:nvSpPr>
+        <p:spPr>
+          <a:xfrm>
+            <a:off x="502920" y="320040"/>
+            <a:ext cx="11064240" cy="640080"/>
+          </a:xfrm>
+          <a:prstGeom prst="rect">
+            <a:avLst/>
+          </a:prstGeom>
+          <a:noFill/>
+        </p:spPr>
+        <p:txBody>
+          <a:bodyPr wrap="square" lIns="0" tIns="0" rIns="0" bIns="0">
+            <a:spAutoFit/>
+          </a:bodyPr>
+          <a:lstStyle/>
+          <a:p>
+            <a:pPr>
+              <a:defRPr sz="3200" b="1">
+                <a:solidFill>
+                  <a:srgbClr val="1A2530"/>
+                </a:solidFill>
+                <a:latin typeface="Arial"/>
+              </a:defRPr>
+            </a:pPr>
+            <a:r>
+              <a:rPr sz="2500" b="1">
+                <a:solidFill>
+                  <a:srgbClr val="16223C"/>
+                </a:solidFill>
+                <a:latin typeface="Aptos"/>
+              </a:rPr>
+              <a:t>The Penalty of Failure: Aliasing</a:t>
+            </a:r>
+          </a:p>
+        </p:txBody>
+      </p:sp>
+      <p:sp>
+        <p:nvSpPr>
+          <p:cNvPr id="3" name="TextBox 2"/>
+          <p:cNvSpPr txBox="1"/>
+          <p:nvPr/>
+        </p:nvSpPr>
+        <p:spPr>
+          <a:xfrm>
+            <a:off x="594360" y="1143000"/>
+            <a:ext cx="5486400" cy="5120640"/>
+          </a:xfrm>
+          <a:prstGeom prst="rect">
+            <a:avLst/>
+          </a:prstGeom>
+          <a:noFill/>
+        </p:spPr>
+        <p:txBody>
+          <a:bodyPr wrap="square" lIns="0" tIns="0" rIns="0" bIns="0">
+            <a:normAutofit/>
+          </a:bodyPr>
+          <a:lstStyle/>
+          <a:p>
+            <a:pPr>
+              <a:spcAft>
+                <a:spcPts val="700"/>
+              </a:spcAft>
+              <a:defRPr sz="1800">
+                <a:solidFill>
+                  <a:srgbClr val="1A2530"/>
+                </a:solidFill>
+                <a:latin typeface="Arial"/>
+              </a:defRPr>
+            </a:pPr>
+            <a:r>
+              <a:rPr sz="1400">
+                <a:solidFill>
+                  <a:srgbClr val="5D5E67"/>
+                </a:solidFill>
+                <a:latin typeface="Aptos"/>
+              </a:rPr>
+              <a:t>Under-sampling: Occurs when a sound wave changes faster than the digital system is configured to sample it (fs &lt; 2 * fmax).</a:t>
+            </a:r>
+          </a:p>
+          <a:p>
+            <a:pPr>
+              <a:spcAft>
+                <a:spcPts val="700"/>
+              </a:spcAft>
+              <a:defRPr sz="1800">
+                <a:solidFill>
+                  <a:srgbClr val="1A2530"/>
+                </a:solidFill>
+                <a:latin typeface="Arial"/>
+              </a:defRPr>
+            </a:pPr>
+            <a:r>
+              <a:rPr sz="1400">
+                <a:solidFill>
+                  <a:srgbClr val="5D5E67"/>
+                </a:solidFill>
+                <a:latin typeface="Aptos"/>
+              </a:rPr>
+              <a:t>Spectral Folding: The high-frequency wave reflects back across the Nyquist limit, impersonating an artificial low-frequency wave.</a:t>
+            </a:r>
+          </a:p>
+          <a:p>
+            <a:pPr>
+              <a:spcAft>
+                <a:spcPts val="700"/>
+              </a:spcAft>
+              <a:defRPr sz="1800">
+                <a:solidFill>
+                  <a:srgbClr val="1A2530"/>
+                </a:solidFill>
+                <a:latin typeface="Arial"/>
+              </a:defRPr>
+            </a:pPr>
+            <a:r>
+              <a:rPr sz="1400">
+                <a:solidFill>
+                  <a:srgbClr val="5D5E67"/>
+                </a:solidFill>
+                <a:latin typeface="Aptos"/>
+              </a:rPr>
+              <a:t>Digital Distortion: Creates harsh, metallic noise that is permanently baked into the data stream and cannot be filtered out later.</a:t>
+            </a:r>
+          </a:p>
+          <a:p>
+            <a:pPr>
+              <a:spcAft>
+                <a:spcPts val="700"/>
+              </a:spcAft>
+              <a:defRPr sz="1800">
+                <a:solidFill>
+                  <a:srgbClr val="1A2530"/>
+                </a:solidFill>
+                <a:latin typeface="Arial"/>
+              </a:defRPr>
+            </a:pPr>
+            <a:r>
+              <a:rPr sz="1400">
+                <a:solidFill>
+                  <a:srgbClr val="5D5E67"/>
+                </a:solidFill>
+                <a:latin typeface="Aptos"/>
+              </a:rPr>
+              <a:t>Prevention: The hardware anti-aliasing filter forces strict compliance by cutting off illegal high frequencies prior to conversion.</a:t>
+            </a:r>
+          </a:p>
+        </p:txBody>
+      </p:sp>
+      <p:sp>
+        <p:nvSpPr>
+          <p:cNvPr id="4" name="Rectangle 3"/>
+          <p:cNvSpPr/>
+          <p:nvPr/>
+        </p:nvSpPr>
+        <p:spPr>
+          <a:xfrm>
+            <a:off x="0" y="0"/>
+            <a:ext cx="109728" cy="6858000"/>
+          </a:xfrm>
+          <a:prstGeom prst="rect">
+            <a:avLst/>
+          </a:prstGeom>
+          <a:solidFill>
+            <a:srgbClr val="684AA8"/>
+          </a:solidFill>
+          <a:ln>
+            <a:noFill/>
+          </a:ln>
+        </p:spPr>
+        <p:style>
+          <a:lnRef idx="1">
+            <a:schemeClr val="accent1"/>
+          </a:lnRef>
+          <a:fillRef idx="3">
+            <a:schemeClr val="accent1"/>
+          </a:fillRef>
+          <a:effectRef idx="2">
+            <a:schemeClr val="accent1"/>
+          </a:effectRef>
+          <a:fontRef idx="minor">
+            <a:schemeClr val="lt1"/>
+          </a:fontRef>
+        </p:style>
+        <p:txBody>
+          <a:bodyPr rtlCol="0" anchor="ctr"/>
+          <a:lstStyle/>
+          <a:p>
+            <a:pPr algn="ctr"/>
+            <a:endParaRPr/>
+          </a:p>
+        </p:txBody>
+      </p:sp>
+      <p:sp>
+        <p:nvSpPr>
+          <p:cNvPr id="5" name="Rounded Rectangle 4"/>
+          <p:cNvSpPr/>
+          <p:nvPr/>
+        </p:nvSpPr>
+        <p:spPr>
+          <a:xfrm>
+            <a:off x="6309360" y="1143000"/>
+            <a:ext cx="5349240" cy="5212080"/>
+          </a:xfrm>
+          <a:prstGeom prst="roundRect">
+            <a:avLst/>
+          </a:prstGeom>
+          <a:solidFill>
+            <a:srgbClr val="F7F5FA"/>
+          </a:solidFill>
+          <a:ln w="12700">
+            <a:solidFill>
+              <a:srgbClr val="DAD5E2"/>
+            </a:solidFill>
+          </a:ln>
+        </p:spPr>
+        <p:style>
+          <a:lnRef idx="1">
+            <a:schemeClr val="accent1"/>
+          </a:lnRef>
+          <a:fillRef idx="3">
+            <a:schemeClr val="accent1"/>
+          </a:fillRef>
+          <a:effectRef idx="2">
+            <a:schemeClr val="accent1"/>
+          </a:effectRef>
+          <a:fontRef idx="minor">
+            <a:schemeClr val="lt1"/>
+          </a:fontRef>
+        </p:style>
+        <p:txBody>
+          <a:bodyPr rtlCol="0" anchor="ctr"/>
+          <a:lstStyle/>
+          <a:p>
+            <a:pPr algn="ctr"/>
+            <a:endParaRPr/>
+          </a:p>
+        </p:txBody>
+      </p:sp>
       <p:pic>
         <p:nvPicPr>
-          <p:cNvPr id="2" name="Picture 1" descr="slide_06.png"/>
+          <p:cNvPr id="6" name="Picture 5" descr="slide06.png"/>
           <p:cNvPicPr>
             <a:picLocks noChangeAspect="1"/>
           </p:cNvPicPr>
@@ -3649,26 +6169,59 @@
         </p:blipFill>
         <p:spPr>
           <a:xfrm>
-            <a:off x="0" y="0"/>
-            <a:ext cx="12191999" cy="6858000"/>
+            <a:off x="6537960" y="1417320"/>
+            <a:ext cx="4892040" cy="3711680"/>
           </a:xfrm>
           <a:prstGeom prst="rect">
             <a:avLst/>
           </a:prstGeom>
         </p:spPr>
       </p:pic>
+      <p:sp>
+        <p:nvSpPr>
+          <p:cNvPr id="7" name="TextBox 6"/>
+          <p:cNvSpPr txBox="1"/>
+          <p:nvPr/>
+        </p:nvSpPr>
+        <p:spPr>
+          <a:xfrm>
+            <a:off x="6492240" y="5989320"/>
+            <a:ext cx="4937760" cy="274320"/>
+          </a:xfrm>
+          <a:prstGeom prst="rect">
+            <a:avLst/>
+          </a:prstGeom>
+          <a:noFill/>
+        </p:spPr>
+        <p:txBody>
+          <a:bodyPr wrap="none">
+            <a:spAutoFit/>
+          </a:bodyPr>
+          <a:lstStyle/>
+          <a:p>
+            <a:pPr algn="r"/>
+            <a:r>
+              <a:rPr sz="900">
+                <a:solidFill>
+                  <a:srgbClr val="5D5E67"/>
+                </a:solidFill>
+                <a:latin typeface="Aptos"/>
+              </a:rPr>
+              <a:t>Concept diagram</a:t>
+            </a:r>
+          </a:p>
+        </p:txBody>
+      </p:sp>
     </p:spTree>
+    <p:extLst>
+      <p:ext uri="{BB962C8B-B14F-4D97-AF65-F5344CB8AC3E}">
+        <p14:creationId xmlns:p14="http://schemas.microsoft.com/office/powerpoint/2010/main" val="440405892"/>
+      </p:ext>
+    </p:extLst>
   </p:cSld>
   <p:clrMapOvr>
     <a:masterClrMapping/>
   </p:clrMapOvr>
-  <p:timing>
-    <p:tnLst>
-      <p:par>
-        <p:cTn id="1" dur="indefinite" restart="never" nodeType="tmRoot"/>
-      </p:par>
-    </p:tnLst>
-  </p:timing>
 </p:sld>
 </file>
 
@@ -3689,9 +6242,252 @@
           <a:chExt cx="0" cy="0"/>
         </a:xfrm>
       </p:grpSpPr>
+      <p:sp>
+        <p:nvSpPr>
+          <p:cNvPr id="2" name="TextBox 1"/>
+          <p:cNvSpPr txBox="1"/>
+          <p:nvPr/>
+        </p:nvSpPr>
+        <p:spPr>
+          <a:xfrm>
+            <a:off x="502920" y="320040"/>
+            <a:ext cx="11064240" cy="640080"/>
+          </a:xfrm>
+          <a:prstGeom prst="rect">
+            <a:avLst/>
+          </a:prstGeom>
+          <a:noFill/>
+        </p:spPr>
+        <p:txBody>
+          <a:bodyPr wrap="square" lIns="0" tIns="0" rIns="0" bIns="0">
+            <a:spAutoFit/>
+          </a:bodyPr>
+          <a:lstStyle/>
+          <a:p>
+            <a:pPr>
+              <a:defRPr sz="3200" b="1">
+                <a:solidFill>
+                  <a:srgbClr val="1A2530"/>
+                </a:solidFill>
+                <a:latin typeface="Arial"/>
+              </a:defRPr>
+            </a:pPr>
+            <a:r>
+              <a:rPr sz="2500" b="1">
+                <a:solidFill>
+                  <a:srgbClr val="16223C"/>
+                </a:solidFill>
+                <a:latin typeface="Aptos"/>
+              </a:rPr>
+              <a:t>Real-World Engineering: Why 44.1 kHz?</a:t>
+            </a:r>
+          </a:p>
+        </p:txBody>
+      </p:sp>
+      <p:sp>
+        <p:nvSpPr>
+          <p:cNvPr id="3" name="TextBox 2"/>
+          <p:cNvSpPr txBox="1"/>
+          <p:nvPr/>
+        </p:nvSpPr>
+        <p:spPr>
+          <a:xfrm>
+            <a:off x="594360" y="1143000"/>
+            <a:ext cx="5486400" cy="5120640"/>
+          </a:xfrm>
+          <a:prstGeom prst="rect">
+            <a:avLst/>
+          </a:prstGeom>
+          <a:noFill/>
+        </p:spPr>
+        <p:txBody>
+          <a:bodyPr wrap="square" lIns="0" tIns="0" rIns="0" bIns="0">
+            <a:normAutofit/>
+          </a:bodyPr>
+          <a:lstStyle/>
+          <a:p>
+            <a:pPr>
+              <a:spcAft>
+                <a:spcPts val="700"/>
+              </a:spcAft>
+              <a:defRPr sz="1800">
+                <a:solidFill>
+                  <a:srgbClr val="1A2530"/>
+                </a:solidFill>
+                <a:latin typeface="Arial"/>
+              </a:defRPr>
+            </a:pPr>
+            <a:r>
+              <a:rPr sz="1400">
+                <a:solidFill>
+                  <a:srgbClr val="5D5E67"/>
+                </a:solidFill>
+                <a:latin typeface="Aptos"/>
+              </a:rPr>
+              <a:t>Human Biological Limits: The healthy human auditory system can perceive frequency vibrations up to roughly 20,000 Hz (20 kHz).</a:t>
+            </a:r>
+          </a:p>
+          <a:p>
+            <a:pPr>
+              <a:spcAft>
+                <a:spcPts val="700"/>
+              </a:spcAft>
+              <a:defRPr sz="1800">
+                <a:solidFill>
+                  <a:srgbClr val="1A2530"/>
+                </a:solidFill>
+                <a:latin typeface="Arial"/>
+              </a:defRPr>
+            </a:pPr>
+            <a:r>
+              <a:rPr sz="1400">
+                <a:solidFill>
+                  <a:srgbClr val="5D5E67"/>
+                </a:solidFill>
+                <a:latin typeface="Aptos"/>
+              </a:rPr>
+              <a:t>The Nyquist Baseline: According to the theorem, capturing human hearing requires an absolute minimum baseline of 40 kHz.</a:t>
+            </a:r>
+          </a:p>
+          <a:p>
+            <a:pPr>
+              <a:spcAft>
+                <a:spcPts val="700"/>
+              </a:spcAft>
+              <a:defRPr sz="1800">
+                <a:solidFill>
+                  <a:srgbClr val="1A2530"/>
+                </a:solidFill>
+                <a:latin typeface="Arial"/>
+              </a:defRPr>
+            </a:pPr>
+            <a:r>
+              <a:rPr sz="1400">
+                <a:solidFill>
+                  <a:srgbClr val="5D5E67"/>
+                </a:solidFill>
+                <a:latin typeface="Aptos"/>
+              </a:rPr>
+              <a:t>The Transition Band: The extra 4,100 Hz provides critical breathing room for physical, real-world analog filters to roll off efficiently.</a:t>
+            </a:r>
+          </a:p>
+          <a:p>
+            <a:pPr>
+              <a:spcAft>
+                <a:spcPts val="700"/>
+              </a:spcAft>
+              <a:defRPr sz="1800">
+                <a:solidFill>
+                  <a:srgbClr val="1A2530"/>
+                </a:solidFill>
+                <a:latin typeface="Arial"/>
+              </a:defRPr>
+            </a:pPr>
+            <a:r>
+              <a:rPr sz="1400">
+                <a:solidFill>
+                  <a:srgbClr val="5D5E67"/>
+                </a:solidFill>
+                <a:latin typeface="Aptos"/>
+              </a:rPr>
+              <a:t>Industry Standardization: Established during the early digital audio era to sync seamlessly with global video formats.</a:t>
+            </a:r>
+          </a:p>
+        </p:txBody>
+      </p:sp>
+      <p:sp>
+        <p:nvSpPr>
+          <p:cNvPr id="4" name="Rectangle 3"/>
+          <p:cNvSpPr/>
+          <p:nvPr/>
+        </p:nvSpPr>
+        <p:spPr>
+          <a:xfrm>
+            <a:off x="0" y="0"/>
+            <a:ext cx="109728" cy="6858000"/>
+          </a:xfrm>
+          <a:prstGeom prst="rect">
+            <a:avLst/>
+          </a:prstGeom>
+          <a:solidFill>
+            <a:srgbClr val="684AA8"/>
+          </a:solidFill>
+          <a:ln>
+            <a:noFill/>
+          </a:ln>
+        </p:spPr>
+        <p:style>
+          <a:lnRef idx="1">
+            <a:schemeClr val="accent1"/>
+          </a:lnRef>
+          <a:fillRef idx="3">
+            <a:schemeClr val="accent1"/>
+          </a:fillRef>
+          <a:effectRef idx="2">
+            <a:schemeClr val="accent1"/>
+          </a:effectRef>
+          <a:fontRef idx="minor">
+            <a:schemeClr val="lt1"/>
+          </a:fontRef>
+        </p:style>
+        <p:txBody>
+          <a:bodyPr rtlCol="0" anchor="ctr"/>
+          <a:lstStyle/>
+          <a:p>
+            <a:pPr algn="ctr"/>
+            <a:endParaRPr/>
+          </a:p>
+        </p:txBody>
+      </p:sp>
+      <p:sp>
+        <p:nvSpPr>
+          <p:cNvPr id="5" name="Rounded Rectangle 4"/>
+          <p:cNvSpPr/>
+          <p:nvPr/>
+        </p:nvSpPr>
+        <p:spPr>
+          <a:xfrm>
+            <a:off x="6309360" y="1143000"/>
+            <a:ext cx="5349240" cy="5212080"/>
+          </a:xfrm>
+          <a:prstGeom prst="roundRect">
+            <a:avLst/>
+          </a:prstGeom>
+          <a:solidFill>
+            <a:srgbClr val="F7F5FA"/>
+          </a:solidFill>
+          <a:ln w="12700">
+            <a:solidFill>
+              <a:srgbClr val="DAD5E2"/>
+            </a:solidFill>
+          </a:ln>
+        </p:spPr>
+        <p:style>
+          <a:lnRef idx="1">
+            <a:schemeClr val="accent1"/>
+          </a:lnRef>
+          <a:fillRef idx="3">
+            <a:schemeClr val="accent1"/>
+          </a:fillRef>
+          <a:effectRef idx="2">
+            <a:schemeClr val="accent1"/>
+          </a:effectRef>
+          <a:fontRef idx="minor">
+            <a:schemeClr val="lt1"/>
+          </a:fontRef>
+        </p:style>
+        <p:txBody>
+          <a:bodyPr rtlCol="0" anchor="ctr"/>
+          <a:lstStyle/>
+          <a:p>
+            <a:pPr algn="ctr"/>
+            <a:endParaRPr/>
+          </a:p>
+        </p:txBody>
+      </p:sp>
       <p:pic>
         <p:nvPicPr>
-          <p:cNvPr id="2" name="Picture 1" descr="slide_07.png"/>
+          <p:cNvPr id="6" name="Picture 5" descr="slide07.png"/>
           <p:cNvPicPr>
             <a:picLocks noChangeAspect="1"/>
           </p:cNvPicPr>
@@ -3705,15 +6501,55 @@
         </p:blipFill>
         <p:spPr>
           <a:xfrm>
-            <a:off x="0" y="0"/>
-            <a:ext cx="12191999" cy="6858000"/>
+            <a:off x="6537960" y="1417320"/>
+            <a:ext cx="4892040" cy="3182253"/>
           </a:xfrm>
           <a:prstGeom prst="rect">
             <a:avLst/>
           </a:prstGeom>
         </p:spPr>
       </p:pic>
+      <p:sp>
+        <p:nvSpPr>
+          <p:cNvPr id="7" name="TextBox 6"/>
+          <p:cNvSpPr txBox="1"/>
+          <p:nvPr/>
+        </p:nvSpPr>
+        <p:spPr>
+          <a:xfrm>
+            <a:off x="6492240" y="5989320"/>
+            <a:ext cx="4937760" cy="274320"/>
+          </a:xfrm>
+          <a:prstGeom prst="rect">
+            <a:avLst/>
+          </a:prstGeom>
+          <a:noFill/>
+        </p:spPr>
+        <p:txBody>
+          <a:bodyPr wrap="none">
+            <a:spAutoFit/>
+          </a:bodyPr>
+          <a:lstStyle/>
+          <a:p>
+            <a:pPr algn="r"/>
+            <a:r>
+              <a:rPr sz="900">
+                <a:solidFill>
+                  <a:srgbClr val="5D5E67"/>
+                </a:solidFill>
+                <a:latin typeface="Aptos"/>
+              </a:rPr>
+              <a:t>Concept diagram</a:t>
+            </a:r>
+          </a:p>
+        </p:txBody>
+      </p:sp>
     </p:spTree>
+    <p:extLst>
+      <p:ext uri="{BB962C8B-B14F-4D97-AF65-F5344CB8AC3E}">
+        <p14:creationId xmlns:p14="http://schemas.microsoft.com/office/powerpoint/2010/main" val="2815662926"/>
+      </p:ext>
+    </p:extLst>
   </p:cSld>
   <p:clrMapOvr>
     <a:masterClrMapping/>
@@ -3738,9 +6574,296 @@
           <a:chExt cx="0" cy="0"/>
         </a:xfrm>
       </p:grpSpPr>
+      <p:sp>
+        <p:nvSpPr>
+          <p:cNvPr id="2" name="TextBox 1"/>
+          <p:cNvSpPr txBox="1"/>
+          <p:nvPr/>
+        </p:nvSpPr>
+        <p:spPr>
+          <a:xfrm>
+            <a:off x="502920" y="320040"/>
+            <a:ext cx="11064240" cy="640080"/>
+          </a:xfrm>
+          <a:prstGeom prst="rect">
+            <a:avLst/>
+          </a:prstGeom>
+          <a:noFill/>
+        </p:spPr>
+        <p:txBody>
+          <a:bodyPr wrap="square" lIns="0" tIns="0" rIns="0" bIns="0">
+            <a:spAutoFit/>
+          </a:bodyPr>
+          <a:lstStyle/>
+          <a:p>
+            <a:pPr>
+              <a:defRPr sz="3200" b="1">
+                <a:solidFill>
+                  <a:srgbClr val="1A2530"/>
+                </a:solidFill>
+                <a:latin typeface="Arial"/>
+              </a:defRPr>
+            </a:pPr>
+            <a:r>
+              <a:rPr sz="2500" b="1">
+                <a:solidFill>
+                  <a:srgbClr val="16223C"/>
+                </a:solidFill>
+                <a:latin typeface="Aptos"/>
+              </a:rPr>
+              <a:t>Step 2: Amplitude Discretisation (Quantisation)</a:t>
+            </a:r>
+          </a:p>
+        </p:txBody>
+      </p:sp>
+      <p:sp>
+        <p:nvSpPr>
+          <p:cNvPr id="3" name="TextBox 2"/>
+          <p:cNvSpPr txBox="1"/>
+          <p:nvPr/>
+        </p:nvSpPr>
+        <p:spPr>
+          <a:xfrm>
+            <a:off x="594360" y="1143000"/>
+            <a:ext cx="5486400" cy="5120640"/>
+          </a:xfrm>
+          <a:prstGeom prst="rect">
+            <a:avLst/>
+          </a:prstGeom>
+          <a:noFill/>
+        </p:spPr>
+        <p:txBody>
+          <a:bodyPr wrap="square" lIns="0" tIns="0" rIns="0" bIns="0">
+            <a:normAutofit/>
+          </a:bodyPr>
+          <a:lstStyle/>
+          <a:p>
+            <a:pPr>
+              <a:spcAft>
+                <a:spcPts val="700"/>
+              </a:spcAft>
+              <a:defRPr sz="1800">
+                <a:solidFill>
+                  <a:srgbClr val="1A2530"/>
+                </a:solidFill>
+                <a:latin typeface="Arial"/>
+              </a:defRPr>
+            </a:pPr>
+            <a:r>
+              <a:rPr sz="1400">
+                <a:solidFill>
+                  <a:srgbClr val="5D5E67"/>
+                </a:solidFill>
+                <a:latin typeface="Aptos"/>
+              </a:rPr>
+              <a:t>The Axis Split: While sampling slices the horizontal axis (Time), quantisation slices the vertical axis (Voltage Level).</a:t>
+            </a:r>
+          </a:p>
+          <a:p>
+            <a:pPr>
+              <a:spcAft>
+                <a:spcPts val="700"/>
+              </a:spcAft>
+              <a:defRPr sz="1800">
+                <a:solidFill>
+                  <a:srgbClr val="1A2530"/>
+                </a:solidFill>
+                <a:latin typeface="Arial"/>
+              </a:defRPr>
+            </a:pPr>
+            <a:r>
+              <a:rPr sz="1400">
+                <a:solidFill>
+                  <a:srgbClr val="5D5E67"/>
+                </a:solidFill>
+                <a:latin typeface="Aptos"/>
+              </a:rPr>
+              <a:t>Bit Depth (Resolution): The exact number of bits dedicated to expressing the numeric value of each individual sample point.</a:t>
+            </a:r>
+          </a:p>
+          <a:p>
+            <a:pPr>
+              <a:spcAft>
+                <a:spcPts val="700"/>
+              </a:spcAft>
+              <a:defRPr sz="1800">
+                <a:solidFill>
+                  <a:srgbClr val="1A2530"/>
+                </a:solidFill>
+                <a:latin typeface="Arial"/>
+              </a:defRPr>
+            </a:pPr>
+            <a:r>
+              <a:rPr sz="1400">
+                <a:solidFill>
+                  <a:srgbClr val="5D5E67"/>
+                </a:solidFill>
+                <a:latin typeface="Aptos"/>
+              </a:rPr>
+              <a:t>Resolution Scale Levels:</a:t>
+            </a:r>
+          </a:p>
+          <a:p>
+            <a:pPr lvl="1">
+              <a:spcAft>
+                <a:spcPts val="700"/>
+              </a:spcAft>
+              <a:defRPr sz="1600">
+                <a:solidFill>
+                  <a:srgbClr val="6C7A89"/>
+                </a:solidFill>
+                <a:latin typeface="Arial"/>
+              </a:defRPr>
+            </a:pPr>
+            <a:r>
+              <a:rPr sz="1400">
+                <a:solidFill>
+                  <a:srgbClr val="5D5E67"/>
+                </a:solidFill>
+                <a:latin typeface="Aptos"/>
+              </a:rPr>
+              <a:t>  - 16-Bit (CD Quality): Provides 2^16 = 65,536 distinct numerical amplitude steps.</a:t>
+            </a:r>
+          </a:p>
+          <a:p>
+            <a:pPr lvl="1">
+              <a:spcAft>
+                <a:spcPts val="700"/>
+              </a:spcAft>
+              <a:defRPr sz="1600">
+                <a:solidFill>
+                  <a:srgbClr val="6C7A89"/>
+                </a:solidFill>
+                <a:latin typeface="Arial"/>
+              </a:defRPr>
+            </a:pPr>
+            <a:r>
+              <a:rPr sz="1400">
+                <a:solidFill>
+                  <a:srgbClr val="5D5E67"/>
+                </a:solidFill>
+                <a:latin typeface="Aptos"/>
+              </a:rPr>
+              <a:t>  - 24-Bit (Studio Master): Provides 2^24 = 16,777,216 distinct numerical amplitude steps.</a:t>
+            </a:r>
+          </a:p>
+          <a:p>
+            <a:pPr>
+              <a:spcAft>
+                <a:spcPts val="700"/>
+              </a:spcAft>
+              <a:defRPr sz="1800">
+                <a:solidFill>
+                  <a:srgbClr val="1A2530"/>
+                </a:solidFill>
+                <a:latin typeface="Arial"/>
+              </a:defRPr>
+            </a:pPr>
+            <a:r>
+              <a:rPr sz="1400">
+                <a:solidFill>
+                  <a:srgbClr val="5D5E67"/>
+                </a:solidFill>
+                <a:latin typeface="Aptos"/>
+              </a:rPr>
+              <a:t>Quantisation Error: The tiny mathematical rounding offset between the true wave voltage and the nearest grid line. This error generates a permanent low-level noise floor.</a:t>
+            </a:r>
+          </a:p>
+        </p:txBody>
+      </p:sp>
+      <p:sp>
+        <p:nvSpPr>
+          <p:cNvPr id="4" name="Rectangle 3"/>
+          <p:cNvSpPr/>
+          <p:nvPr/>
+        </p:nvSpPr>
+        <p:spPr>
+          <a:xfrm>
+            <a:off x="0" y="0"/>
+            <a:ext cx="109728" cy="6858000"/>
+          </a:xfrm>
+          <a:prstGeom prst="rect">
+            <a:avLst/>
+          </a:prstGeom>
+          <a:solidFill>
+            <a:srgbClr val="684AA8"/>
+          </a:solidFill>
+          <a:ln>
+            <a:noFill/>
+          </a:ln>
+        </p:spPr>
+        <p:style>
+          <a:lnRef idx="1">
+            <a:schemeClr val="accent1"/>
+          </a:lnRef>
+          <a:fillRef idx="3">
+            <a:schemeClr val="accent1"/>
+          </a:fillRef>
+          <a:effectRef idx="2">
+            <a:schemeClr val="accent1"/>
+          </a:effectRef>
+          <a:fontRef idx="minor">
+            <a:schemeClr val="lt1"/>
+          </a:fontRef>
+        </p:style>
+        <p:txBody>
+          <a:bodyPr rtlCol="0" anchor="ctr"/>
+          <a:lstStyle/>
+          <a:p>
+            <a:pPr algn="ctr"/>
+            <a:endParaRPr/>
+          </a:p>
+        </p:txBody>
+      </p:sp>
+      <p:sp>
+        <p:nvSpPr>
+          <p:cNvPr id="5" name="Rounded Rectangle 4"/>
+          <p:cNvSpPr/>
+          <p:nvPr/>
+        </p:nvSpPr>
+        <p:spPr>
+          <a:xfrm>
+            <a:off x="6309360" y="1143000"/>
+            <a:ext cx="5349240" cy="5212080"/>
+          </a:xfrm>
+          <a:prstGeom prst="roundRect">
+            <a:avLst/>
+          </a:prstGeom>
+          <a:solidFill>
+            <a:srgbClr val="F7F5FA"/>
+          </a:solidFill>
+          <a:ln w="12700">
+            <a:solidFill>
+              <a:srgbClr val="DAD5E2"/>
+            </a:solidFill>
+          </a:ln>
+        </p:spPr>
+        <p:style>
+          <a:lnRef idx="1">
+            <a:schemeClr val="accent1"/>
+          </a:lnRef>
+          <a:fillRef idx="3">
+            <a:schemeClr val="accent1"/>
+          </a:fillRef>
+          <a:effectRef idx="2">
+            <a:schemeClr val="accent1"/>
+          </a:effectRef>
+          <a:fontRef idx="minor">
+            <a:schemeClr val="lt1"/>
+          </a:fontRef>
+        </p:style>
+        <p:txBody>
+          <a:bodyPr rtlCol="0" anchor="ctr"/>
+          <a:lstStyle/>
+          <a:p>
+            <a:pPr algn="ctr"/>
+            <a:endParaRPr/>
+          </a:p>
+        </p:txBody>
+      </p:sp>
       <p:pic>
         <p:nvPicPr>
-          <p:cNvPr id="2" name="Picture 1" descr="slide_08.png"/>
+          <p:cNvPr id="6" name="Picture 5" descr="slide08.png"/>
           <p:cNvPicPr>
             <a:picLocks noChangeAspect="1"/>
           </p:cNvPicPr>
@@ -3754,8 +6877,8 @@
         </p:blipFill>
         <p:spPr>
           <a:xfrm>
-            <a:off x="0" y="0"/>
-            <a:ext cx="12191999" cy="6858000"/>
+            <a:off x="6537960" y="1417320"/>
+            <a:ext cx="4892040" cy="3435668"/>
           </a:xfrm>
           <a:prstGeom prst="rect">
             <a:avLst/>
@@ -3764,18 +6887,19 @@
       </p:pic>
       <p:sp>
         <p:nvSpPr>
-          <p:cNvPr id="3" name="Rectangle 2"/>
-          <p:cNvSpPr/>
+          <p:cNvPr id="7" name="TextBox 6"/>
+          <p:cNvSpPr txBox="1"/>
           <p:nvPr/>
         </p:nvSpPr>
         <p:spPr>
           <a:xfrm>
-            <a:off x="3219556" y="2697110"/>
-            <a:ext cx="2382383" cy="769441"/>
+            <a:off x="6492240" y="5989320"/>
+            <a:ext cx="4937760" cy="274320"/>
           </a:xfrm>
           <a:prstGeom prst="rect">
             <a:avLst/>
           </a:prstGeom>
+          <a:noFill/>
         </p:spPr>
         <p:txBody>
           <a:bodyPr wrap="none">
@@ -3783,96 +6907,25 @@
           </a:bodyPr>
           <a:lstStyle/>
           <a:p>
-            <a:r>
-              <a:rPr lang="en-AU" sz="1100" dirty="0"/>
-              <a:t>Network Address </a:t>
-            </a:r>
-            <a:r>
-              <a:rPr lang="en-AU" sz="1100" dirty="0" smtClean="0"/>
-              <a:t>Translation</a:t>
-            </a:r>
-          </a:p>
-          <a:p>
-            <a:r>
-              <a:rPr lang="en-AU" sz="1100" dirty="0"/>
-              <a:t>Interactive Connectivity </a:t>
-            </a:r>
-            <a:r>
-              <a:rPr lang="en-AU" sz="1100" dirty="0" smtClean="0"/>
-              <a:t>Establishment</a:t>
-            </a:r>
-          </a:p>
-          <a:p>
-            <a:r>
-              <a:rPr lang="en-AU" sz="1100" dirty="0"/>
-              <a:t>Session Traversal Utilities for </a:t>
-            </a:r>
-            <a:r>
-              <a:rPr lang="en-AU" sz="1100" dirty="0" smtClean="0"/>
-              <a:t>NAT</a:t>
-            </a:r>
-            <a:br>
-              <a:rPr lang="en-AU" sz="1100" dirty="0" smtClean="0"/>
-            </a:br>
-            <a:r>
-              <a:rPr lang="en-US" sz="1100" dirty="0" smtClean="0"/>
-              <a:t>Traversal </a:t>
-            </a:r>
-            <a:r>
-              <a:rPr lang="en-US" sz="1100" dirty="0"/>
-              <a:t>Using Relays around </a:t>
-            </a:r>
-            <a:r>
-              <a:rPr lang="en-US" sz="1100" dirty="0" smtClean="0"/>
-              <a:t>NAT</a:t>
-            </a:r>
-          </a:p>
-        </p:txBody>
-      </p:sp>
-      <p:sp>
-        <p:nvSpPr>
-          <p:cNvPr id="4" name="Rectangle 3"/>
-          <p:cNvSpPr/>
-          <p:nvPr/>
-        </p:nvSpPr>
-        <p:spPr>
-          <a:xfrm>
-            <a:off x="754743" y="4208921"/>
-            <a:ext cx="2387600" cy="430887"/>
-          </a:xfrm>
-          <a:prstGeom prst="rect">
-            <a:avLst/>
-          </a:prstGeom>
-        </p:spPr>
-        <p:txBody>
-          <a:bodyPr wrap="square">
-            <a:spAutoFit/>
-          </a:bodyPr>
-          <a:lstStyle/>
-          <a:p>
-            <a:r>
-              <a:rPr lang="en-US" sz="1100" dirty="0"/>
-              <a:t>Datagram Transport Layer </a:t>
-            </a:r>
-            <a:r>
-              <a:rPr lang="en-US" sz="1100" dirty="0" smtClean="0"/>
-              <a:t>Security</a:t>
-            </a:r>
-          </a:p>
-          <a:p>
-            <a:r>
-              <a:rPr lang="en-US" sz="1100" dirty="0" smtClean="0"/>
-              <a:t>Secure </a:t>
-            </a:r>
-            <a:r>
-              <a:rPr lang="en-US" sz="1100" dirty="0"/>
-              <a:t>Real-time Transport Protocol</a:t>
-            </a:r>
-            <a:endParaRPr lang="en-AU" sz="1100" dirty="0"/>
+            <a:pPr algn="r"/>
+            <a:r>
+              <a:rPr sz="900">
+                <a:solidFill>
+                  <a:srgbClr val="5D5E67"/>
+                </a:solidFill>
+                <a:latin typeface="Aptos"/>
+              </a:rPr>
+              <a:t>Concept diagram</a:t>
+            </a:r>
           </a:p>
         </p:txBody>
       </p:sp>
     </p:spTree>
+    <p:extLst>
+      <p:ext uri="{BB962C8B-B14F-4D97-AF65-F5344CB8AC3E}">
+        <p14:creationId xmlns:p14="http://schemas.microsoft.com/office/powerpoint/2010/main" val="1886400841"/>
+      </p:ext>
+    </p:extLst>
   </p:cSld>
   <p:clrMapOvr>
     <a:masterClrMapping/>
@@ -3897,40 +6950,293 @@
           <a:chExt cx="0" cy="0"/>
         </a:xfrm>
       </p:grpSpPr>
+      <p:sp>
+        <p:nvSpPr>
+          <p:cNvPr id="2" name="TextBox 1"/>
+          <p:cNvSpPr txBox="1"/>
+          <p:nvPr/>
+        </p:nvSpPr>
+        <p:spPr>
+          <a:xfrm>
+            <a:off x="502920" y="111034"/>
+            <a:ext cx="11064240" cy="640080"/>
+          </a:xfrm>
+          <a:prstGeom prst="rect">
+            <a:avLst/>
+          </a:prstGeom>
+          <a:noFill/>
+        </p:spPr>
+        <p:txBody>
+          <a:bodyPr wrap="square" lIns="0" tIns="0" rIns="0" bIns="0">
+            <a:spAutoFit/>
+          </a:bodyPr>
+          <a:lstStyle/>
+          <a:p>
+            <a:pPr>
+              <a:defRPr sz="3200" b="1">
+                <a:solidFill>
+                  <a:srgbClr val="1A2530"/>
+                </a:solidFill>
+                <a:latin typeface="Arial"/>
+              </a:defRPr>
+            </a:pPr>
+            <a:r>
+              <a:rPr sz="2500" b="1" dirty="0">
+                <a:solidFill>
+                  <a:srgbClr val="16223C"/>
+                </a:solidFill>
+                <a:latin typeface="Aptos"/>
+              </a:rPr>
+              <a:t>Pulse Code Modulation (PCM) &amp; WAV Files</a:t>
+            </a:r>
+          </a:p>
+        </p:txBody>
+      </p:sp>
+      <p:sp>
+        <p:nvSpPr>
+          <p:cNvPr id="3" name="TextBox 2"/>
+          <p:cNvSpPr txBox="1"/>
+          <p:nvPr/>
+        </p:nvSpPr>
+        <p:spPr>
+          <a:xfrm>
+            <a:off x="502920" y="542108"/>
+            <a:ext cx="11467011" cy="1875971"/>
+          </a:xfrm>
+          <a:prstGeom prst="rect">
+            <a:avLst/>
+          </a:prstGeom>
+          <a:noFill/>
+        </p:spPr>
+        <p:txBody>
+          <a:bodyPr wrap="square" lIns="0" tIns="0" rIns="0" bIns="0">
+            <a:normAutofit/>
+          </a:bodyPr>
+          <a:lstStyle/>
+          <a:p>
+            <a:pPr>
+              <a:spcAft>
+                <a:spcPts val="700"/>
+              </a:spcAft>
+              <a:defRPr sz="1800">
+                <a:solidFill>
+                  <a:srgbClr val="1A2530"/>
+                </a:solidFill>
+                <a:latin typeface="Arial"/>
+              </a:defRPr>
+            </a:pPr>
+            <a:r>
+              <a:rPr sz="1400" dirty="0">
+                <a:solidFill>
+                  <a:srgbClr val="5D5E67"/>
+                </a:solidFill>
+                <a:latin typeface="Aptos"/>
+              </a:rPr>
+              <a:t>PCM Generation: The sequential stream of </a:t>
+            </a:r>
+            <a:r>
+              <a:rPr sz="1400" dirty="0" err="1">
+                <a:solidFill>
+                  <a:srgbClr val="5D5E67"/>
+                </a:solidFill>
+                <a:latin typeface="Aptos"/>
+              </a:rPr>
+              <a:t>quantised</a:t>
+            </a:r>
+            <a:r>
+              <a:rPr sz="1400" dirty="0">
+                <a:solidFill>
+                  <a:srgbClr val="5D5E67"/>
+                </a:solidFill>
+                <a:latin typeface="Aptos"/>
+              </a:rPr>
+              <a:t> integers is encoded directly into a continuous digital </a:t>
+            </a:r>
+            <a:r>
+              <a:rPr sz="1400" dirty="0" err="1">
+                <a:solidFill>
+                  <a:srgbClr val="5D5E67"/>
+                </a:solidFill>
+                <a:latin typeface="Aptos"/>
+              </a:rPr>
+              <a:t>bitstream</a:t>
+            </a:r>
+            <a:r>
+              <a:rPr sz="1400" dirty="0">
+                <a:solidFill>
+                  <a:srgbClr val="5D5E67"/>
+                </a:solidFill>
+                <a:latin typeface="Aptos"/>
+              </a:rPr>
+              <a:t>.</a:t>
+            </a:r>
+          </a:p>
+          <a:p>
+            <a:pPr>
+              <a:spcAft>
+                <a:spcPts val="700"/>
+              </a:spcAft>
+              <a:defRPr sz="1800">
+                <a:solidFill>
+                  <a:srgbClr val="1A2530"/>
+                </a:solidFill>
+                <a:latin typeface="Arial"/>
+              </a:defRPr>
+            </a:pPr>
+            <a:r>
+              <a:rPr sz="1400" dirty="0">
+                <a:solidFill>
+                  <a:srgbClr val="5D5E67"/>
+                </a:solidFill>
+                <a:latin typeface="Aptos"/>
+              </a:rPr>
+              <a:t>WAV Container Architecture:</a:t>
+            </a:r>
+          </a:p>
+          <a:p>
+            <a:pPr lvl="1">
+              <a:spcAft>
+                <a:spcPts val="700"/>
+              </a:spcAft>
+              <a:defRPr sz="1600">
+                <a:solidFill>
+                  <a:srgbClr val="6C7A89"/>
+                </a:solidFill>
+                <a:latin typeface="Arial"/>
+              </a:defRPr>
+            </a:pPr>
+            <a:r>
+              <a:rPr sz="1400" dirty="0">
+                <a:solidFill>
+                  <a:srgbClr val="5D5E67"/>
+                </a:solidFill>
+                <a:latin typeface="Aptos"/>
+              </a:rPr>
+              <a:t>  - Header Chunk: Defines critical file identity parameters: sample rate, bit depth, and channel configurations (Mono/Stereo).</a:t>
+            </a:r>
+          </a:p>
+          <a:p>
+            <a:pPr lvl="1">
+              <a:spcAft>
+                <a:spcPts val="700"/>
+              </a:spcAft>
+              <a:defRPr sz="1600">
+                <a:solidFill>
+                  <a:srgbClr val="6C7A89"/>
+                </a:solidFill>
+                <a:latin typeface="Arial"/>
+              </a:defRPr>
+            </a:pPr>
+            <a:r>
+              <a:rPr sz="1400" dirty="0">
+                <a:solidFill>
+                  <a:srgbClr val="5D5E67"/>
+                </a:solidFill>
+                <a:latin typeface="Aptos"/>
+              </a:rPr>
+              <a:t>  - Data Chunk: A massive, uncompressed sequential block of raw binary data representing audio amplitude over time.</a:t>
+            </a:r>
+          </a:p>
+          <a:p>
+            <a:pPr>
+              <a:spcAft>
+                <a:spcPts val="700"/>
+              </a:spcAft>
+              <a:defRPr sz="1800">
+                <a:solidFill>
+                  <a:srgbClr val="1A2530"/>
+                </a:solidFill>
+                <a:latin typeface="Arial"/>
+              </a:defRPr>
+            </a:pPr>
+            <a:r>
+              <a:rPr sz="1400" dirty="0">
+                <a:solidFill>
+                  <a:srgbClr val="5D5E67"/>
+                </a:solidFill>
+                <a:latin typeface="Aptos"/>
+              </a:rPr>
+              <a:t>Data Rate Formula: Bit Rate = Sample Rate * Bit Depth * Number of Channels</a:t>
+            </a:r>
+          </a:p>
+          <a:p>
+            <a:pPr lvl="1">
+              <a:spcAft>
+                <a:spcPts val="700"/>
+              </a:spcAft>
+              <a:defRPr sz="1600">
+                <a:solidFill>
+                  <a:srgbClr val="6C7A89"/>
+                </a:solidFill>
+                <a:latin typeface="Arial"/>
+              </a:defRPr>
+            </a:pPr>
+            <a:r>
+              <a:rPr sz="1400" dirty="0">
+                <a:solidFill>
+                  <a:srgbClr val="5D5E67"/>
+                </a:solidFill>
+                <a:latin typeface="Aptos"/>
+              </a:rPr>
+              <a:t>  - CD Calculation: 44,100 Hz * 16 bits * 2 channels = 1,411.2 kbps constant data throughput.</a:t>
+            </a:r>
+          </a:p>
+        </p:txBody>
+      </p:sp>
+      <p:sp>
+        <p:nvSpPr>
+          <p:cNvPr id="4" name="Rectangle 3"/>
+          <p:cNvSpPr/>
+          <p:nvPr/>
+        </p:nvSpPr>
+        <p:spPr>
+          <a:xfrm>
+            <a:off x="0" y="0"/>
+            <a:ext cx="109728" cy="6858000"/>
+          </a:xfrm>
+          <a:prstGeom prst="rect">
+            <a:avLst/>
+          </a:prstGeom>
+          <a:solidFill>
+            <a:srgbClr val="684AA8"/>
+          </a:solidFill>
+          <a:ln>
+            <a:noFill/>
+          </a:ln>
+        </p:spPr>
+        <p:style>
+          <a:lnRef idx="1">
+            <a:schemeClr val="accent1"/>
+          </a:lnRef>
+          <a:fillRef idx="3">
+            <a:schemeClr val="accent1"/>
+          </a:fillRef>
+          <a:effectRef idx="2">
+            <a:schemeClr val="accent1"/>
+          </a:effectRef>
+          <a:fontRef idx="minor">
+            <a:schemeClr val="lt1"/>
+          </a:fontRef>
+        </p:style>
+        <p:txBody>
+          <a:bodyPr rtlCol="0" anchor="ctr"/>
+          <a:lstStyle/>
+          <a:p>
+            <a:pPr algn="ctr"/>
+            <a:endParaRPr/>
+          </a:p>
+        </p:txBody>
+      </p:sp>
       <p:pic>
         <p:nvPicPr>
-          <p:cNvPr id="2" name="Picture 1" descr="slide_09.png"/>
+          <p:cNvPr id="8" name="Picture 7"/>
           <p:cNvPicPr>
             <a:picLocks noChangeAspect="1"/>
           </p:cNvPicPr>
           <p:nvPr/>
         </p:nvPicPr>
         <p:blipFill>
-          <a:blip r:embed="rId2"/>
-          <a:stretch>
-            <a:fillRect/>
-          </a:stretch>
-        </p:blipFill>
-        <p:spPr>
-          <a:xfrm>
-            <a:off x="0" y="0"/>
-            <a:ext cx="12191999" cy="6858000"/>
-          </a:xfrm>
-          <a:prstGeom prst="rect">
-            <a:avLst/>
-          </a:prstGeom>
-        </p:spPr>
-      </p:pic>
-      <p:pic>
-        <p:nvPicPr>
-          <p:cNvPr id="3" name="Picture 2"/>
-          <p:cNvPicPr>
-            <a:picLocks noChangeAspect="1"/>
-          </p:cNvPicPr>
-          <p:nvPr/>
-        </p:nvPicPr>
-        <p:blipFill>
-          <a:blip r:embed="rId3" cstate="print">
+          <a:blip r:embed="rId2">
             <a:extLst>
               <a:ext uri="{28A0092B-C50C-407E-A947-70E740481C1C}">
                 <a14:useLocalDpi xmlns:a14="http://schemas.microsoft.com/office/drawing/2010/main" val="0"/>
@@ -3943,8 +7249,8 @@
         </p:blipFill>
         <p:spPr>
           <a:xfrm>
-            <a:off x="8585151" y="2580846"/>
-            <a:ext cx="2324983" cy="2324983"/>
+            <a:off x="181429" y="2256971"/>
+            <a:ext cx="12010571" cy="4601029"/>
           </a:xfrm>
           <a:prstGeom prst="rect">
             <a:avLst/>
@@ -3952,6 +7258,11 @@
         </p:spPr>
       </p:pic>
     </p:spTree>
+    <p:extLst>
+      <p:ext uri="{BB962C8B-B14F-4D97-AF65-F5344CB8AC3E}">
+        <p14:creationId xmlns:p14="http://schemas.microsoft.com/office/powerpoint/2010/main" val="3158808160"/>
+      </p:ext>
+    </p:extLst>
   </p:cSld>
   <p:clrMapOvr>
     <a:masterClrMapping/>
